--- a/public/assets/editable/professional-logo-design-sales-presentation-2/fr/Professional Logo Design Sales Presentation - fr.pptx
+++ b/public/assets/editable/professional-logo-design-sales-presentation-2/fr/Professional Logo Design Sales Presentation - fr.pptx
@@ -2030,16 +2030,59 @@
         <p:spPr>
           <a:xfrm>
             <a:off x="457200" y="868680"/>
-            <a:ext cx="10972800" cy="594360"/>
-          </a:xfrm>
-          <a:prstGeom prst="rect">
-            <a:avLst/>
-          </a:prstGeom>
-          <a:noFill/>
-          <a:ln/>
-        </p:spPr>
-        <p:txBody>
-          <a:bodyPr wrap="square" rtlCol="0" anchor="ctr"/>
+            <a:ext cx="6949440" cy="502920"/>
+          </a:xfrm>
+          <a:prstGeom prst="rect">
+            <a:avLst/>
+          </a:prstGeom>
+          <a:noFill/>
+          <a:ln/>
+        </p:spPr>
+        <p:txBody>
+          <a:bodyPr wrap="square" rtlCol="0" anchor="t">
+            <a:normAutofit/>
+          </a:bodyPr>
+          <a:lstStyle/>
+          <a:p>
+            <a:pPr indent="0" marL="0">
+              <a:buNone/>
+            </a:pPr>
+            <a:r>
+              <a:rPr lang="en-US" sz="2200" b="1" dirty="0">
+                <a:solidFill>
+                  <a:srgbClr val="1A1A1A"/>
+                </a:solidFill>
+                <a:latin typeface="Arial" pitchFamily="34" charset="0"/>
+                <a:ea typeface="Arial" pitchFamily="34" charset="-122"/>
+                <a:cs typeface="Arial" pitchFamily="34" charset="-120"/>
+              </a:rPr>
+              <a:t>Conception de Logo Professionnel</a:t>
+            </a:r>
+            <a:endParaRPr lang="en-US" sz="2200" dirty="0"/>
+          </a:p>
+        </p:txBody>
+      </p:sp>
+      <p:sp>
+        <p:nvSpPr>
+          <p:cNvPr id="5" name="Text 3"/>
+          <p:cNvSpPr/>
+          <p:nvPr/>
+        </p:nvSpPr>
+        <p:spPr>
+          <a:xfrm>
+            <a:off x="457200" y="1481328"/>
+            <a:ext cx="6949440" cy="1532128"/>
+          </a:xfrm>
+          <a:prstGeom prst="rect">
+            <a:avLst/>
+          </a:prstGeom>
+          <a:noFill/>
+          <a:ln/>
+        </p:spPr>
+        <p:txBody>
+          <a:bodyPr wrap="square" rtlCol="0" anchor="t">
+            <a:normAutofit/>
+          </a:bodyPr>
           <a:lstStyle/>
           <a:p>
             <a:pPr indent="0" marL="0">
@@ -2062,62 +2105,25 @@
       </p:sp>
       <p:sp>
         <p:nvSpPr>
-          <p:cNvPr id="5" name="Text 3"/>
-          <p:cNvSpPr/>
-          <p:nvPr/>
-        </p:nvSpPr>
-        <p:spPr>
-          <a:xfrm>
-            <a:off x="457200" y="1645920"/>
-            <a:ext cx="10972800" cy="594360"/>
-          </a:xfrm>
-          <a:prstGeom prst="rect">
-            <a:avLst/>
-          </a:prstGeom>
-          <a:noFill/>
-          <a:ln/>
-        </p:spPr>
-        <p:txBody>
-          <a:bodyPr wrap="square" rtlCol="0" anchor="ctr"/>
-          <a:lstStyle/>
-          <a:p>
-            <a:pPr indent="0" marL="0">
-              <a:buNone/>
-            </a:pPr>
-            <a:r>
-              <a:rPr lang="en-US" sz="2200" b="1" dirty="0">
-                <a:solidFill>
-                  <a:srgbClr val="1A1A1A"/>
-                </a:solidFill>
-                <a:latin typeface="Arial" pitchFamily="34" charset="0"/>
-                <a:ea typeface="Arial" pitchFamily="34" charset="-122"/>
-                <a:cs typeface="Arial" pitchFamily="34" charset="-120"/>
-              </a:rPr>
-              <a:t>CONCEPTION DE LOGO PROFESSIONNEL</a:t>
-            </a:r>
-            <a:endParaRPr lang="en-US" sz="2200" dirty="0"/>
-          </a:p>
-        </p:txBody>
-      </p:sp>
-      <p:sp>
-        <p:nvSpPr>
           <p:cNvPr id="6" name="Text 4"/>
           <p:cNvSpPr/>
           <p:nvPr/>
         </p:nvSpPr>
         <p:spPr>
           <a:xfrm>
-            <a:off x="457200" y="2240280"/>
-            <a:ext cx="10972800" cy="822960"/>
-          </a:xfrm>
-          <a:prstGeom prst="rect">
-            <a:avLst/>
-          </a:prstGeom>
-          <a:noFill/>
-          <a:ln/>
-        </p:spPr>
-        <p:txBody>
-          <a:bodyPr wrap="square" rtlCol="0" anchor="t"/>
+            <a:off x="457200" y="3123184"/>
+            <a:ext cx="6949440" cy="502920"/>
+          </a:xfrm>
+          <a:prstGeom prst="rect">
+            <a:avLst/>
+          </a:prstGeom>
+          <a:noFill/>
+          <a:ln/>
+        </p:spPr>
+        <p:txBody>
+          <a:bodyPr wrap="square" rtlCol="0" anchor="t">
+            <a:normAutofit/>
+          </a:bodyPr>
           <a:lstStyle/>
           <a:p>
             <a:pPr indent="0" marL="0">
@@ -2154,8 +2160,8 @@
         </p:blipFill>
         <p:spPr>
           <a:xfrm>
-            <a:off x="7772400" y="1097280"/>
-            <a:ext cx="3657600" cy="2286000"/>
+            <a:off x="7680960" y="1005840"/>
+            <a:ext cx="3840480" cy="2560320"/>
           </a:xfrm>
           <a:prstGeom prst="rect">
             <a:avLst/>
@@ -2272,6 +2278,88 @@
           </a:p>
         </p:txBody>
       </p:sp>
+      <p:sp>
+        <p:nvSpPr>
+          <p:cNvPr id="4" name="Text 2"/>
+          <p:cNvSpPr/>
+          <p:nvPr/>
+        </p:nvSpPr>
+        <p:spPr>
+          <a:xfrm>
+            <a:off x="457200" y="868680"/>
+            <a:ext cx="10972800" cy="502920"/>
+          </a:xfrm>
+          <a:prstGeom prst="rect">
+            <a:avLst/>
+          </a:prstGeom>
+          <a:noFill/>
+          <a:ln/>
+        </p:spPr>
+        <p:txBody>
+          <a:bodyPr wrap="square" rtlCol="0" anchor="t">
+            <a:normAutofit/>
+          </a:bodyPr>
+          <a:lstStyle/>
+          <a:p>
+            <a:pPr indent="0" marL="0">
+              <a:buNone/>
+            </a:pPr>
+            <a:r>
+              <a:rPr lang="en-US" sz="2200" b="1" dirty="0">
+                <a:solidFill>
+                  <a:srgbClr val="1A1A1A"/>
+                </a:solidFill>
+                <a:latin typeface="Arial" pitchFamily="34" charset="0"/>
+                <a:ea typeface="Arial" pitchFamily="34" charset="-122"/>
+                <a:cs typeface="Arial" pitchFamily="34" charset="-120"/>
+              </a:rPr>
+              <a:t>Gestion des objections</a:t>
+            </a:r>
+            <a:endParaRPr lang="en-US" sz="2200" dirty="0"/>
+          </a:p>
+        </p:txBody>
+      </p:sp>
+      <p:sp>
+        <p:nvSpPr>
+          <p:cNvPr id="5" name="Text 3"/>
+          <p:cNvSpPr/>
+          <p:nvPr/>
+        </p:nvSpPr>
+        <p:spPr>
+          <a:xfrm>
+            <a:off x="457200" y="1481328"/>
+            <a:ext cx="10972800" cy="502920"/>
+          </a:xfrm>
+          <a:prstGeom prst="rect">
+            <a:avLst/>
+          </a:prstGeom>
+          <a:noFill/>
+          <a:ln/>
+        </p:spPr>
+        <p:txBody>
+          <a:bodyPr wrap="square" rtlCol="0" anchor="t">
+            <a:normAutofit/>
+          </a:bodyPr>
+          <a:lstStyle/>
+          <a:p>
+            <a:pPr indent="0" marL="0">
+              <a:buNone/>
+            </a:pPr>
+            <a:r>
+              <a:rPr lang="en-US" sz="2200" b="1" dirty="0">
+                <a:solidFill>
+                  <a:srgbClr val="1A1A1A"/>
+                </a:solidFill>
+                <a:latin typeface="Arial" pitchFamily="34" charset="0"/>
+                <a:ea typeface="Arial" pitchFamily="34" charset="-122"/>
+                <a:cs typeface="Arial" pitchFamily="34" charset="-120"/>
+              </a:rPr>
+              <a:t>Les cinq principales préoccupations — et comment y répondre.</a:t>
+            </a:r>
+            <a:endParaRPr lang="en-US" sz="2200" dirty="0"/>
+          </a:p>
+        </p:txBody>
+      </p:sp>
     </p:spTree>
   </p:cSld>
   <p:clrMapOvr>
@@ -2382,6 +2470,334 @@
           </a:p>
         </p:txBody>
       </p:sp>
+      <p:sp>
+        <p:nvSpPr>
+          <p:cNvPr id="4" name="Text 2"/>
+          <p:cNvSpPr/>
+          <p:nvPr/>
+        </p:nvSpPr>
+        <p:spPr>
+          <a:xfrm>
+            <a:off x="457200" y="868680"/>
+            <a:ext cx="10972800" cy="502920"/>
+          </a:xfrm>
+          <a:prstGeom prst="rect">
+            <a:avLst/>
+          </a:prstGeom>
+          <a:noFill/>
+          <a:ln/>
+        </p:spPr>
+        <p:txBody>
+          <a:bodyPr wrap="square" rtlCol="0" anchor="t">
+            <a:normAutofit/>
+          </a:bodyPr>
+          <a:lstStyle/>
+          <a:p>
+            <a:pPr indent="0" marL="0">
+              <a:buNone/>
+            </a:pPr>
+            <a:r>
+              <a:rPr lang="en-US" sz="2200" b="1" dirty="0">
+                <a:solidFill>
+                  <a:srgbClr val="1A1A1A"/>
+                </a:solidFill>
+                <a:latin typeface="Arial" pitchFamily="34" charset="0"/>
+                <a:ea typeface="Arial" pitchFamily="34" charset="-122"/>
+                <a:cs typeface="Arial" pitchFamily="34" charset="-120"/>
+              </a:rPr>
+              <a:t>Positionnement concurrentiel</a:t>
+            </a:r>
+            <a:endParaRPr lang="en-US" sz="2200" dirty="0"/>
+          </a:p>
+        </p:txBody>
+      </p:sp>
+      <p:sp>
+        <p:nvSpPr>
+          <p:cNvPr id="5" name="Text 3"/>
+          <p:cNvSpPr/>
+          <p:nvPr/>
+        </p:nvSpPr>
+        <p:spPr>
+          <a:xfrm>
+            <a:off x="457200" y="1481328"/>
+            <a:ext cx="10972800" cy="502920"/>
+          </a:xfrm>
+          <a:prstGeom prst="rect">
+            <a:avLst/>
+          </a:prstGeom>
+          <a:noFill/>
+          <a:ln/>
+        </p:spPr>
+        <p:txBody>
+          <a:bodyPr wrap="square" rtlCol="0" anchor="t">
+            <a:normAutofit/>
+          </a:bodyPr>
+          <a:lstStyle/>
+          <a:p>
+            <a:pPr indent="0" marL="0">
+              <a:buNone/>
+            </a:pPr>
+            <a:r>
+              <a:rPr lang="en-US" sz="2200" b="1" dirty="0">
+                <a:solidFill>
+                  <a:srgbClr val="1A1A1A"/>
+                </a:solidFill>
+                <a:latin typeface="Arial" pitchFamily="34" charset="0"/>
+                <a:ea typeface="Arial" pitchFamily="34" charset="-122"/>
+                <a:cs typeface="Arial" pitchFamily="34" charset="-120"/>
+              </a:rPr>
+              <a:t>Pourquoi nous gagnons.</a:t>
+            </a:r>
+            <a:endParaRPr lang="en-US" sz="2200" dirty="0"/>
+          </a:p>
+        </p:txBody>
+      </p:sp>
+      <p:sp>
+        <p:nvSpPr>
+          <p:cNvPr id="6" name="Text 4"/>
+          <p:cNvSpPr/>
+          <p:nvPr/>
+        </p:nvSpPr>
+        <p:spPr>
+          <a:xfrm>
+            <a:off x="457200" y="2093976"/>
+            <a:ext cx="10972800" cy="502920"/>
+          </a:xfrm>
+          <a:prstGeom prst="rect">
+            <a:avLst/>
+          </a:prstGeom>
+          <a:noFill/>
+          <a:ln/>
+        </p:spPr>
+        <p:txBody>
+          <a:bodyPr wrap="square" rtlCol="0" anchor="t">
+            <a:normAutofit/>
+          </a:bodyPr>
+          <a:lstStyle/>
+          <a:p>
+            <a:pPr indent="0" marL="0">
+              <a:buNone/>
+            </a:pPr>
+            <a:r>
+              <a:rPr lang="en-US" sz="1300" dirty="0">
+                <a:solidFill>
+                  <a:srgbClr val="4A4A4A"/>
+                </a:solidFill>
+                <a:latin typeface="Arial" pitchFamily="34" charset="0"/>
+                <a:ea typeface="Arial" pitchFamily="34" charset="-122"/>
+                <a:cs typeface="Arial" pitchFamily="34" charset="-120"/>
+              </a:rPr>
+              <a:t>Quatre catégories. Une phrase chacune. Utilisez la ligne correspondante lorsqu'un prospect nomme un concurrent spécifique.</a:t>
+            </a:r>
+            <a:endParaRPr lang="en-US" sz="1300" dirty="0"/>
+          </a:p>
+        </p:txBody>
+      </p:sp>
+      <p:sp>
+        <p:nvSpPr>
+          <p:cNvPr id="7" name="Text 5"/>
+          <p:cNvSpPr/>
+          <p:nvPr/>
+        </p:nvSpPr>
+        <p:spPr>
+          <a:xfrm>
+            <a:off x="457200" y="2734056"/>
+            <a:ext cx="10972800" cy="502920"/>
+          </a:xfrm>
+          <a:prstGeom prst="rect">
+            <a:avLst/>
+          </a:prstGeom>
+          <a:noFill/>
+          <a:ln/>
+        </p:spPr>
+        <p:txBody>
+          <a:bodyPr wrap="square" rtlCol="0" anchor="t">
+            <a:normAutofit/>
+          </a:bodyPr>
+          <a:lstStyle/>
+          <a:p>
+            <a:pPr indent="0" marL="0">
+              <a:buNone/>
+            </a:pPr>
+            <a:r>
+              <a:rPr lang="en-US" sz="1600" b="1" dirty="0">
+                <a:solidFill>
+                  <a:srgbClr val="1A1A1A"/>
+                </a:solidFill>
+                <a:latin typeface="Arial" pitchFamily="34" charset="0"/>
+                <a:ea typeface="Arial" pitchFamily="34" charset="-122"/>
+                <a:cs typeface="Arial" pitchFamily="34" charset="-120"/>
+              </a:rPr>
+              <a:t>Phrase clé</a:t>
+            </a:r>
+            <a:endParaRPr lang="en-US" sz="1600" dirty="0"/>
+          </a:p>
+        </p:txBody>
+      </p:sp>
+      <p:sp>
+        <p:nvSpPr>
+          <p:cNvPr id="8" name="Text 6"/>
+          <p:cNvSpPr/>
+          <p:nvPr/>
+        </p:nvSpPr>
+        <p:spPr>
+          <a:xfrm>
+            <a:off x="457200" y="3346704"/>
+            <a:ext cx="10972800" cy="502920"/>
+          </a:xfrm>
+          <a:prstGeom prst="rect">
+            <a:avLst/>
+          </a:prstGeom>
+          <a:noFill/>
+          <a:ln/>
+        </p:spPr>
+        <p:txBody>
+          <a:bodyPr wrap="square" rtlCol="0" anchor="t">
+            <a:normAutofit/>
+          </a:bodyPr>
+          <a:lstStyle/>
+          <a:p>
+            <a:pPr indent="0" marL="0">
+              <a:buNone/>
+            </a:pPr>
+            <a:r>
+              <a:rPr lang="en-US" sz="1300" dirty="0">
+                <a:solidFill>
+                  <a:srgbClr val="4A4A4A"/>
+                </a:solidFill>
+                <a:latin typeface="Arial" pitchFamily="34" charset="0"/>
+                <a:ea typeface="Arial" pitchFamily="34" charset="-122"/>
+                <a:cs typeface="Arial" pitchFamily="34" charset="-120"/>
+              </a:rPr>
+              <a:t>Originalité conçue par des humains, transfert total des droits, 11 formats. Les outils gratuits offrent souvent originalité limitée, droits partiels et moins de formats.</a:t>
+            </a:r>
+            <a:endParaRPr lang="en-US" sz="1300" dirty="0"/>
+          </a:p>
+        </p:txBody>
+      </p:sp>
+      <p:sp>
+        <p:nvSpPr>
+          <p:cNvPr id="9" name="Text 7"/>
+          <p:cNvSpPr/>
+          <p:nvPr/>
+        </p:nvSpPr>
+        <p:spPr>
+          <a:xfrm>
+            <a:off x="457200" y="3986784"/>
+            <a:ext cx="10972800" cy="502920"/>
+          </a:xfrm>
+          <a:prstGeom prst="rect">
+            <a:avLst/>
+          </a:prstGeom>
+          <a:noFill/>
+          <a:ln/>
+        </p:spPr>
+        <p:txBody>
+          <a:bodyPr wrap="square" rtlCol="0" anchor="t">
+            <a:normAutofit/>
+          </a:bodyPr>
+          <a:lstStyle/>
+          <a:p>
+            <a:pPr indent="0" marL="0">
+              <a:buNone/>
+            </a:pPr>
+            <a:r>
+              <a:rPr lang="en-US" sz="1300" dirty="0">
+                <a:solidFill>
+                  <a:srgbClr val="4A4A4A"/>
+                </a:solidFill>
+                <a:latin typeface="Arial" pitchFamily="34" charset="0"/>
+                <a:ea typeface="Arial" pitchFamily="34" charset="-122"/>
+                <a:cs typeface="Arial" pitchFamily="34" charset="-120"/>
+              </a:rPr>
+              <a:t>Un coordinateur dédié et une équipe interne ayant livré plus de 75 000 logos — pas un inconnu jonglant avec trente projets. Délais prévisibles.</a:t>
+            </a:r>
+            <a:endParaRPr lang="en-US" sz="1300" dirty="0"/>
+          </a:p>
+        </p:txBody>
+      </p:sp>
+      <p:sp>
+        <p:nvSpPr>
+          <p:cNvPr id="10" name="Text 8"/>
+          <p:cNvSpPr/>
+          <p:nvPr/>
+        </p:nvSpPr>
+        <p:spPr>
+          <a:xfrm>
+            <a:off x="457200" y="4626864"/>
+            <a:ext cx="10972800" cy="502920"/>
+          </a:xfrm>
+          <a:prstGeom prst="rect">
+            <a:avLst/>
+          </a:prstGeom>
+          <a:noFill/>
+          <a:ln/>
+        </p:spPr>
+        <p:txBody>
+          <a:bodyPr wrap="square" rtlCol="0" anchor="t">
+            <a:normAutofit/>
+          </a:bodyPr>
+          <a:lstStyle/>
+          <a:p>
+            <a:pPr indent="0" marL="0">
+              <a:buNone/>
+            </a:pPr>
+            <a:r>
+              <a:rPr lang="en-US" sz="1300" dirty="0">
+                <a:solidFill>
+                  <a:srgbClr val="4A4A4A"/>
+                </a:solidFill>
+                <a:latin typeface="Arial" pitchFamily="34" charset="0"/>
+                <a:ea typeface="Arial" pitchFamily="34" charset="-122"/>
+                <a:cs typeface="Arial" pitchFamily="34" charset="-120"/>
+              </a:rPr>
+              <a:t>Qualité comparable à une fraction du coût, avec un périmètre et un calendrier définis. Pas de factures surprises, pas de dérive, pas d'engagements de six mois.</a:t>
+            </a:r>
+            <a:endParaRPr lang="en-US" sz="1300" dirty="0"/>
+          </a:p>
+        </p:txBody>
+      </p:sp>
+      <p:sp>
+        <p:nvSpPr>
+          <p:cNvPr id="11" name="Text 9"/>
+          <p:cNvSpPr/>
+          <p:nvPr/>
+        </p:nvSpPr>
+        <p:spPr>
+          <a:xfrm>
+            <a:off x="457200" y="5266944"/>
+            <a:ext cx="10972800" cy="502920"/>
+          </a:xfrm>
+          <a:prstGeom prst="rect">
+            <a:avLst/>
+          </a:prstGeom>
+          <a:noFill/>
+          <a:ln/>
+        </p:spPr>
+        <p:txBody>
+          <a:bodyPr wrap="square" rtlCol="0" anchor="t">
+            <a:normAutofit/>
+          </a:bodyPr>
+          <a:lstStyle/>
+          <a:p>
+            <a:pPr indent="0" marL="0">
+              <a:buNone/>
+            </a:pPr>
+            <a:r>
+              <a:rPr lang="en-US" sz="1300" dirty="0">
+                <a:solidFill>
+                  <a:srgbClr val="4A4A4A"/>
+                </a:solidFill>
+                <a:latin typeface="Arial" pitchFamily="34" charset="0"/>
+                <a:ea typeface="Arial" pitchFamily="34" charset="-122"/>
+                <a:cs typeface="Arial" pitchFamily="34" charset="-120"/>
+              </a:rPr>
+              <a:t>20% des logos de 2025 sont générés par IA — ils se ressemblent de plus en plus. Les marques conçues par des humains restent plus différenciées et plus défendables comme marques déposées.</a:t>
+            </a:r>
+            <a:endParaRPr lang="en-US" sz="1300" dirty="0"/>
+          </a:p>
+        </p:txBody>
+      </p:sp>
     </p:spTree>
   </p:cSld>
   <p:clrMapOvr>
@@ -2492,6 +2908,375 @@
           </a:p>
         </p:txBody>
       </p:sp>
+      <p:sp>
+        <p:nvSpPr>
+          <p:cNvPr id="4" name="Text 2"/>
+          <p:cNvSpPr/>
+          <p:nvPr/>
+        </p:nvSpPr>
+        <p:spPr>
+          <a:xfrm>
+            <a:off x="457200" y="868680"/>
+            <a:ext cx="10972800" cy="502920"/>
+          </a:xfrm>
+          <a:prstGeom prst="rect">
+            <a:avLst/>
+          </a:prstGeom>
+          <a:noFill/>
+          <a:ln/>
+        </p:spPr>
+        <p:txBody>
+          <a:bodyPr wrap="square" rtlCol="0" anchor="t">
+            <a:normAutofit/>
+          </a:bodyPr>
+          <a:lstStyle/>
+          <a:p>
+            <a:pPr indent="0" marL="0">
+              <a:buNone/>
+            </a:pPr>
+            <a:r>
+              <a:rPr lang="en-US" sz="2200" b="1" dirty="0">
+                <a:solidFill>
+                  <a:srgbClr val="1A1A1A"/>
+                </a:solidFill>
+                <a:latin typeface="Arial" pitchFamily="34" charset="0"/>
+                <a:ea typeface="Arial" pitchFamily="34" charset="-122"/>
+                <a:cs typeface="Arial" pitchFamily="34" charset="-120"/>
+              </a:rPr>
+              <a:t>Questions fréquentes</a:t>
+            </a:r>
+            <a:endParaRPr lang="en-US" sz="2200" dirty="0"/>
+          </a:p>
+        </p:txBody>
+      </p:sp>
+      <p:sp>
+        <p:nvSpPr>
+          <p:cNvPr id="5" name="Text 3"/>
+          <p:cNvSpPr/>
+          <p:nvPr/>
+        </p:nvSpPr>
+        <p:spPr>
+          <a:xfrm>
+            <a:off x="457200" y="1481328"/>
+            <a:ext cx="10972800" cy="502920"/>
+          </a:xfrm>
+          <a:prstGeom prst="rect">
+            <a:avLst/>
+          </a:prstGeom>
+          <a:noFill/>
+          <a:ln/>
+        </p:spPr>
+        <p:txBody>
+          <a:bodyPr wrap="square" rtlCol="0" anchor="t">
+            <a:normAutofit/>
+          </a:bodyPr>
+          <a:lstStyle/>
+          <a:p>
+            <a:pPr indent="0" marL="0">
+              <a:buNone/>
+            </a:pPr>
+            <a:r>
+              <a:rPr lang="en-US" sz="2200" b="1" dirty="0">
+                <a:solidFill>
+                  <a:srgbClr val="1A1A1A"/>
+                </a:solidFill>
+                <a:latin typeface="Arial" pitchFamily="34" charset="0"/>
+                <a:ea typeface="Arial" pitchFamily="34" charset="-122"/>
+                <a:cs typeface="Arial" pitchFamily="34" charset="-120"/>
+              </a:rPr>
+              <a:t>Les questions les plus posées par les clients.</a:t>
+            </a:r>
+            <a:endParaRPr lang="en-US" sz="2200" dirty="0"/>
+          </a:p>
+        </p:txBody>
+      </p:sp>
+      <p:sp>
+        <p:nvSpPr>
+          <p:cNvPr id="6" name="Text 4"/>
+          <p:cNvSpPr/>
+          <p:nvPr/>
+        </p:nvSpPr>
+        <p:spPr>
+          <a:xfrm>
+            <a:off x="457200" y="2093976"/>
+            <a:ext cx="10972800" cy="502920"/>
+          </a:xfrm>
+          <a:prstGeom prst="rect">
+            <a:avLst/>
+          </a:prstGeom>
+          <a:noFill/>
+          <a:ln/>
+        </p:spPr>
+        <p:txBody>
+          <a:bodyPr wrap="square" rtlCol="0" anchor="t">
+            <a:normAutofit/>
+          </a:bodyPr>
+          <a:lstStyle/>
+          <a:p>
+            <a:pPr indent="0" marL="0">
+              <a:buNone/>
+            </a:pPr>
+            <a:r>
+              <a:rPr lang="en-US" sz="1600" b="1" dirty="0">
+                <a:solidFill>
+                  <a:srgbClr val="1A1A1A"/>
+                </a:solidFill>
+                <a:latin typeface="Arial" pitchFamily="34" charset="0"/>
+                <a:ea typeface="Arial" pitchFamily="34" charset="-122"/>
+                <a:cs typeface="Arial" pitchFamily="34" charset="-120"/>
+              </a:rPr>
+              <a:t>Combien de révisions sont incluses ?</a:t>
+            </a:r>
+            <a:endParaRPr lang="en-US" sz="1600" dirty="0"/>
+          </a:p>
+        </p:txBody>
+      </p:sp>
+      <p:sp>
+        <p:nvSpPr>
+          <p:cNvPr id="7" name="Text 5"/>
+          <p:cNvSpPr/>
+          <p:nvPr/>
+        </p:nvSpPr>
+        <p:spPr>
+          <a:xfrm>
+            <a:off x="457200" y="2706624"/>
+            <a:ext cx="10972800" cy="502920"/>
+          </a:xfrm>
+          <a:prstGeom prst="rect">
+            <a:avLst/>
+          </a:prstGeom>
+          <a:noFill/>
+          <a:ln/>
+        </p:spPr>
+        <p:txBody>
+          <a:bodyPr wrap="square" rtlCol="0" anchor="t">
+            <a:normAutofit/>
+          </a:bodyPr>
+          <a:lstStyle/>
+          <a:p>
+            <a:pPr indent="0" marL="0">
+              <a:buNone/>
+            </a:pPr>
+            <a:r>
+              <a:rPr lang="en-US" sz="1300" dirty="0">
+                <a:solidFill>
+                  <a:srgbClr val="4A4A4A"/>
+                </a:solidFill>
+                <a:latin typeface="Arial" pitchFamily="34" charset="0"/>
+                <a:ea typeface="Arial" pitchFamily="34" charset="-122"/>
+                <a:cs typeface="Arial" pitchFamily="34" charset="-120"/>
+              </a:rPr>
+              <a:t>Jusqu'à trois cycles dans chaque forfait. Des révisions supplémentaires sont disponibles moyennant des frais.</a:t>
+            </a:r>
+            <a:endParaRPr lang="en-US" sz="1300" dirty="0"/>
+          </a:p>
+        </p:txBody>
+      </p:sp>
+      <p:sp>
+        <p:nvSpPr>
+          <p:cNvPr id="8" name="Text 6"/>
+          <p:cNvSpPr/>
+          <p:nvPr/>
+        </p:nvSpPr>
+        <p:spPr>
+          <a:xfrm>
+            <a:off x="457200" y="3346704"/>
+            <a:ext cx="10972800" cy="502920"/>
+          </a:xfrm>
+          <a:prstGeom prst="rect">
+            <a:avLst/>
+          </a:prstGeom>
+          <a:noFill/>
+          <a:ln/>
+        </p:spPr>
+        <p:txBody>
+          <a:bodyPr wrap="square" rtlCol="0" anchor="t">
+            <a:normAutofit/>
+          </a:bodyPr>
+          <a:lstStyle/>
+          <a:p>
+            <a:pPr indent="0" marL="0">
+              <a:buNone/>
+            </a:pPr>
+            <a:r>
+              <a:rPr lang="en-US" sz="1600" b="1" dirty="0">
+                <a:solidFill>
+                  <a:srgbClr val="1A1A1A"/>
+                </a:solidFill>
+                <a:latin typeface="Arial" pitchFamily="34" charset="0"/>
+                <a:ea typeface="Arial" pitchFamily="34" charset="-122"/>
+                <a:cs typeface="Arial" pitchFamily="34" charset="-120"/>
+              </a:rPr>
+              <a:t>Combien de temps cela prend-il ?</a:t>
+            </a:r>
+            <a:endParaRPr lang="en-US" sz="1600" dirty="0"/>
+          </a:p>
+        </p:txBody>
+      </p:sp>
+      <p:sp>
+        <p:nvSpPr>
+          <p:cNvPr id="9" name="Text 7"/>
+          <p:cNvSpPr/>
+          <p:nvPr/>
+        </p:nvSpPr>
+        <p:spPr>
+          <a:xfrm>
+            <a:off x="457200" y="3959352"/>
+            <a:ext cx="10972800" cy="502920"/>
+          </a:xfrm>
+          <a:prstGeom prst="rect">
+            <a:avLst/>
+          </a:prstGeom>
+          <a:noFill/>
+          <a:ln/>
+        </p:spPr>
+        <p:txBody>
+          <a:bodyPr wrap="square" rtlCol="0" anchor="t">
+            <a:normAutofit/>
+          </a:bodyPr>
+          <a:lstStyle/>
+          <a:p>
+            <a:pPr indent="0" marL="0">
+              <a:buNone/>
+            </a:pPr>
+            <a:r>
+              <a:rPr lang="en-US" sz="1300" dirty="0">
+                <a:solidFill>
+                  <a:srgbClr val="4A4A4A"/>
+                </a:solidFill>
+                <a:latin typeface="Arial" pitchFamily="34" charset="0"/>
+                <a:ea typeface="Arial" pitchFamily="34" charset="-122"/>
+                <a:cs typeface="Arial" pitchFamily="34" charset="-120"/>
+              </a:rPr>
+              <a:t>Les concepts arrivent en trois à cinq jours ouvrés. Les projets complets se terminent en deux à trois semaines.</a:t>
+            </a:r>
+            <a:endParaRPr lang="en-US" sz="1300" dirty="0"/>
+          </a:p>
+        </p:txBody>
+      </p:sp>
+      <p:sp>
+        <p:nvSpPr>
+          <p:cNvPr id="10" name="Text 8"/>
+          <p:cNvSpPr/>
+          <p:nvPr/>
+        </p:nvSpPr>
+        <p:spPr>
+          <a:xfrm>
+            <a:off x="457200" y="4599432"/>
+            <a:ext cx="10972800" cy="502920"/>
+          </a:xfrm>
+          <a:prstGeom prst="rect">
+            <a:avLst/>
+          </a:prstGeom>
+          <a:noFill/>
+          <a:ln/>
+        </p:spPr>
+        <p:txBody>
+          <a:bodyPr wrap="square" rtlCol="0" anchor="t">
+            <a:normAutofit/>
+          </a:bodyPr>
+          <a:lstStyle/>
+          <a:p>
+            <a:pPr indent="0" marL="0">
+              <a:buNone/>
+            </a:pPr>
+            <a:r>
+              <a:rPr lang="en-US" sz="1600" b="1" dirty="0">
+                <a:solidFill>
+                  <a:srgbClr val="1A1A1A"/>
+                </a:solidFill>
+                <a:latin typeface="Arial" pitchFamily="34" charset="0"/>
+                <a:ea typeface="Arial" pitchFamily="34" charset="-122"/>
+                <a:cs typeface="Arial" pitchFamily="34" charset="-120"/>
+              </a:rPr>
+              <a:t>Quels formats de fichier vais-je recevoir ?</a:t>
+            </a:r>
+            <a:endParaRPr lang="en-US" sz="1600" dirty="0"/>
+          </a:p>
+        </p:txBody>
+      </p:sp>
+      <p:sp>
+        <p:nvSpPr>
+          <p:cNvPr id="11" name="Text 9"/>
+          <p:cNvSpPr/>
+          <p:nvPr/>
+        </p:nvSpPr>
+        <p:spPr>
+          <a:xfrm>
+            <a:off x="457200" y="5212080"/>
+            <a:ext cx="10972800" cy="502920"/>
+          </a:xfrm>
+          <a:prstGeom prst="rect">
+            <a:avLst/>
+          </a:prstGeom>
+          <a:noFill/>
+          <a:ln/>
+        </p:spPr>
+        <p:txBody>
+          <a:bodyPr wrap="square" rtlCol="0" anchor="t">
+            <a:normAutofit/>
+          </a:bodyPr>
+          <a:lstStyle/>
+          <a:p>
+            <a:pPr indent="0" marL="0">
+              <a:buNone/>
+            </a:pPr>
+            <a:r>
+              <a:rPr lang="en-US" sz="1300" dirty="0">
+                <a:solidFill>
+                  <a:srgbClr val="4A4A4A"/>
+                </a:solidFill>
+                <a:latin typeface="Arial" pitchFamily="34" charset="0"/>
+                <a:ea typeface="Arial" pitchFamily="34" charset="-122"/>
+                <a:cs typeface="Arial" pitchFamily="34" charset="-120"/>
+              </a:rPr>
+              <a:t>Onze formats — AI, EPS, PDF, JPG, PNG, GIF et ICO. Six en couleur, cinq en noir et blanc.</a:t>
+            </a:r>
+            <a:endParaRPr lang="en-US" sz="1300" dirty="0"/>
+          </a:p>
+        </p:txBody>
+      </p:sp>
+      <p:sp>
+        <p:nvSpPr>
+          <p:cNvPr id="12" name="Text 10"/>
+          <p:cNvSpPr/>
+          <p:nvPr/>
+        </p:nvSpPr>
+        <p:spPr>
+          <a:xfrm>
+            <a:off x="457200" y="5852160"/>
+            <a:ext cx="10972800" cy="502920"/>
+          </a:xfrm>
+          <a:prstGeom prst="rect">
+            <a:avLst/>
+          </a:prstGeom>
+          <a:noFill/>
+          <a:ln/>
+        </p:spPr>
+        <p:txBody>
+          <a:bodyPr wrap="square" rtlCol="0" anchor="t">
+            <a:normAutofit/>
+          </a:bodyPr>
+          <a:lstStyle/>
+          <a:p>
+            <a:pPr indent="0" marL="0">
+              <a:buNone/>
+            </a:pPr>
+            <a:r>
+              <a:rPr lang="en-US" sz="1600" b="1" dirty="0">
+                <a:solidFill>
+                  <a:srgbClr val="1A1A1A"/>
+                </a:solidFill>
+                <a:latin typeface="Arial" pitchFamily="34" charset="0"/>
+                <a:ea typeface="Arial" pitchFamily="34" charset="-122"/>
+                <a:cs typeface="Arial" pitchFamily="34" charset="-120"/>
+              </a:rPr>
+              <a:t>À qui appartient le logo terminé ?</a:t>
+            </a:r>
+            <a:endParaRPr lang="en-US" sz="1600" dirty="0"/>
+          </a:p>
+        </p:txBody>
+      </p:sp>
     </p:spTree>
   </p:cSld>
   <p:clrMapOvr>
@@ -2602,6 +3387,129 @@
           </a:p>
         </p:txBody>
       </p:sp>
+      <p:sp>
+        <p:nvSpPr>
+          <p:cNvPr id="4" name="Text 2"/>
+          <p:cNvSpPr/>
+          <p:nvPr/>
+        </p:nvSpPr>
+        <p:spPr>
+          <a:xfrm>
+            <a:off x="457200" y="868680"/>
+            <a:ext cx="10972800" cy="502920"/>
+          </a:xfrm>
+          <a:prstGeom prst="rect">
+            <a:avLst/>
+          </a:prstGeom>
+          <a:noFill/>
+          <a:ln/>
+        </p:spPr>
+        <p:txBody>
+          <a:bodyPr wrap="square" rtlCol="0" anchor="t">
+            <a:normAutofit/>
+          </a:bodyPr>
+          <a:lstStyle/>
+          <a:p>
+            <a:pPr indent="0" marL="0">
+              <a:buNone/>
+            </a:pPr>
+            <a:r>
+              <a:rPr lang="en-US" sz="2800" b="1" dirty="0">
+                <a:solidFill>
+                  <a:srgbClr val="1A1A1A"/>
+                </a:solidFill>
+                <a:latin typeface="Arial" pitchFamily="34" charset="0"/>
+                <a:ea typeface="Arial" pitchFamily="34" charset="-122"/>
+                <a:cs typeface="Arial" pitchFamily="34" charset="-120"/>
+              </a:rPr>
+              <a:t>Commencer</a:t>
+            </a:r>
+            <a:endParaRPr lang="en-US" sz="2800" dirty="0"/>
+          </a:p>
+        </p:txBody>
+      </p:sp>
+      <p:sp>
+        <p:nvSpPr>
+          <p:cNvPr id="5" name="Text 3"/>
+          <p:cNvSpPr/>
+          <p:nvPr/>
+        </p:nvSpPr>
+        <p:spPr>
+          <a:xfrm>
+            <a:off x="457200" y="1481328"/>
+            <a:ext cx="10972800" cy="502920"/>
+          </a:xfrm>
+          <a:prstGeom prst="rect">
+            <a:avLst/>
+          </a:prstGeom>
+          <a:noFill/>
+          <a:ln/>
+        </p:spPr>
+        <p:txBody>
+          <a:bodyPr wrap="square" rtlCol="0" anchor="t">
+            <a:normAutofit/>
+          </a:bodyPr>
+          <a:lstStyle/>
+          <a:p>
+            <a:pPr indent="0" marL="0">
+              <a:buNone/>
+            </a:pPr>
+            <a:r>
+              <a:rPr lang="en-US" sz="1300" dirty="0">
+                <a:solidFill>
+                  <a:srgbClr val="4A4A4A"/>
+                </a:solidFill>
+                <a:latin typeface="Arial" pitchFamily="34" charset="0"/>
+                <a:ea typeface="Arial" pitchFamily="34" charset="-122"/>
+                <a:cs typeface="Arial" pitchFamily="34" charset="-120"/>
+              </a:rPr>
+              <a:t>Vous avez des questions, souhaitez planifier une démo ou découvrir comment ces solutions peuvent soutenir vos équipes commerciales dès aujourd'hui ?</a:t>
+            </a:r>
+            <a:endParaRPr lang="en-US" sz="1300" dirty="0"/>
+          </a:p>
+        </p:txBody>
+      </p:sp>
+      <p:sp>
+        <p:nvSpPr>
+          <p:cNvPr id="6" name="Text 4"/>
+          <p:cNvSpPr/>
+          <p:nvPr/>
+        </p:nvSpPr>
+        <p:spPr>
+          <a:xfrm>
+            <a:off x="457200" y="2121408"/>
+            <a:ext cx="10972800" cy="502920"/>
+          </a:xfrm>
+          <a:prstGeom prst="rect">
+            <a:avLst/>
+          </a:prstGeom>
+          <a:noFill/>
+          <a:ln/>
+        </p:spPr>
+        <p:txBody>
+          <a:bodyPr wrap="square" rtlCol="0" anchor="t">
+            <a:normAutofit/>
+          </a:bodyPr>
+          <a:lstStyle/>
+          <a:p>
+            <a:pPr indent="0" marL="0">
+              <a:buNone/>
+            </a:pPr>
+            <a:r>
+              <a:rPr lang="en-US" sz="1300" dirty="0">
+                <a:solidFill>
+                  <a:srgbClr val="4A4A4A"/>
+                </a:solidFill>
+                <a:latin typeface="Arial" pitchFamily="34" charset="0"/>
+                <a:ea typeface="Arial" pitchFamily="34" charset="-122"/>
+                <a:cs typeface="Arial" pitchFamily="34" charset="-120"/>
+              </a:rPr>
+              <a:t>Contactez-nous à marketing@hostopia.com pour en savoir plus et échanger avec l'un de nos experts.</a:t>
+            </a:r>
+            <a:endParaRPr lang="en-US" sz="1300" dirty="0"/>
+          </a:p>
+        </p:txBody>
+      </p:sp>
     </p:spTree>
   </p:cSld>
   <p:clrMapOvr>
@@ -2712,6 +3620,375 @@
           </a:p>
         </p:txBody>
       </p:sp>
+      <p:sp>
+        <p:nvSpPr>
+          <p:cNvPr id="4" name="Text 2"/>
+          <p:cNvSpPr/>
+          <p:nvPr/>
+        </p:nvSpPr>
+        <p:spPr>
+          <a:xfrm>
+            <a:off x="457200" y="868680"/>
+            <a:ext cx="10972800" cy="502920"/>
+          </a:xfrm>
+          <a:prstGeom prst="rect">
+            <a:avLst/>
+          </a:prstGeom>
+          <a:noFill/>
+          <a:ln/>
+        </p:spPr>
+        <p:txBody>
+          <a:bodyPr wrap="square" rtlCol="0" anchor="t">
+            <a:normAutofit/>
+          </a:bodyPr>
+          <a:lstStyle/>
+          <a:p>
+            <a:pPr indent="0" marL="0">
+              <a:buNone/>
+            </a:pPr>
+            <a:r>
+              <a:rPr lang="en-US" sz="2200" b="1" dirty="0">
+                <a:solidFill>
+                  <a:srgbClr val="1A1A1A"/>
+                </a:solidFill>
+                <a:latin typeface="Arial" pitchFamily="34" charset="0"/>
+                <a:ea typeface="Arial" pitchFamily="34" charset="-122"/>
+                <a:cs typeface="Arial" pitchFamily="34" charset="-120"/>
+              </a:rPr>
+              <a:t>Ordre du jour</a:t>
+            </a:r>
+            <a:endParaRPr lang="en-US" sz="2200" dirty="0"/>
+          </a:p>
+        </p:txBody>
+      </p:sp>
+      <p:sp>
+        <p:nvSpPr>
+          <p:cNvPr id="5" name="Text 3"/>
+          <p:cNvSpPr/>
+          <p:nvPr/>
+        </p:nvSpPr>
+        <p:spPr>
+          <a:xfrm>
+            <a:off x="457200" y="1481328"/>
+            <a:ext cx="10972800" cy="502920"/>
+          </a:xfrm>
+          <a:prstGeom prst="rect">
+            <a:avLst/>
+          </a:prstGeom>
+          <a:noFill/>
+          <a:ln/>
+        </p:spPr>
+        <p:txBody>
+          <a:bodyPr wrap="square" rtlCol="0" anchor="t">
+            <a:normAutofit/>
+          </a:bodyPr>
+          <a:lstStyle/>
+          <a:p>
+            <a:pPr indent="0" marL="0">
+              <a:buNone/>
+            </a:pPr>
+            <a:r>
+              <a:rPr lang="en-US" sz="2200" b="1" dirty="0">
+                <a:solidFill>
+                  <a:srgbClr val="1A1A1A"/>
+                </a:solidFill>
+                <a:latin typeface="Arial" pitchFamily="34" charset="0"/>
+                <a:ea typeface="Arial" pitchFamily="34" charset="-122"/>
+                <a:cs typeface="Arial" pitchFamily="34" charset="-120"/>
+              </a:rPr>
+              <a:t>Ce que nous couvrirons.</a:t>
+            </a:r>
+            <a:endParaRPr lang="en-US" sz="2200" dirty="0"/>
+          </a:p>
+        </p:txBody>
+      </p:sp>
+      <p:sp>
+        <p:nvSpPr>
+          <p:cNvPr id="6" name="Text 4"/>
+          <p:cNvSpPr/>
+          <p:nvPr/>
+        </p:nvSpPr>
+        <p:spPr>
+          <a:xfrm>
+            <a:off x="457200" y="2093976"/>
+            <a:ext cx="10972800" cy="502920"/>
+          </a:xfrm>
+          <a:prstGeom prst="rect">
+            <a:avLst/>
+          </a:prstGeom>
+          <a:noFill/>
+          <a:ln/>
+        </p:spPr>
+        <p:txBody>
+          <a:bodyPr wrap="square" rtlCol="0" anchor="t">
+            <a:normAutofit/>
+          </a:bodyPr>
+          <a:lstStyle/>
+          <a:p>
+            <a:pPr indent="0" marL="0">
+              <a:buNone/>
+            </a:pPr>
+            <a:r>
+              <a:rPr lang="en-US" sz="1300" dirty="0">
+                <a:solidFill>
+                  <a:srgbClr val="4A4A4A"/>
+                </a:solidFill>
+                <a:latin typeface="Arial" pitchFamily="34" charset="0"/>
+                <a:ea typeface="Arial" pitchFamily="34" charset="-122"/>
+                <a:cs typeface="Arial" pitchFamily="34" charset="-120"/>
+              </a:rPr>
+              <a:t>Vingt-cinq minutes, cinq sections. L'essentiel de la valeur se trouve dans la section cinq.</a:t>
+            </a:r>
+            <a:endParaRPr lang="en-US" sz="1300" dirty="0"/>
+          </a:p>
+        </p:txBody>
+      </p:sp>
+      <p:sp>
+        <p:nvSpPr>
+          <p:cNvPr id="7" name="Text 5"/>
+          <p:cNvSpPr/>
+          <p:nvPr/>
+        </p:nvSpPr>
+        <p:spPr>
+          <a:xfrm>
+            <a:off x="457200" y="2734056"/>
+            <a:ext cx="10972800" cy="502920"/>
+          </a:xfrm>
+          <a:prstGeom prst="rect">
+            <a:avLst/>
+          </a:prstGeom>
+          <a:noFill/>
+          <a:ln/>
+        </p:spPr>
+        <p:txBody>
+          <a:bodyPr wrap="square" rtlCol="0" anchor="t">
+            <a:normAutofit/>
+          </a:bodyPr>
+          <a:lstStyle/>
+          <a:p>
+            <a:pPr indent="0" marL="0">
+              <a:buNone/>
+            </a:pPr>
+            <a:r>
+              <a:rPr lang="en-US" sz="1600" b="1" dirty="0">
+                <a:solidFill>
+                  <a:srgbClr val="1A1A1A"/>
+                </a:solidFill>
+                <a:latin typeface="Arial" pitchFamily="34" charset="0"/>
+                <a:ea typeface="Arial" pitchFamily="34" charset="-122"/>
+                <a:cs typeface="Arial" pitchFamily="34" charset="-120"/>
+              </a:rPr>
+              <a:t>Pourquoi les logos comptent aujourd'hui</a:t>
+            </a:r>
+            <a:endParaRPr lang="en-US" sz="1600" dirty="0"/>
+          </a:p>
+        </p:txBody>
+      </p:sp>
+      <p:sp>
+        <p:nvSpPr>
+          <p:cNvPr id="8" name="Text 6"/>
+          <p:cNvSpPr/>
+          <p:nvPr/>
+        </p:nvSpPr>
+        <p:spPr>
+          <a:xfrm>
+            <a:off x="457200" y="3346704"/>
+            <a:ext cx="10972800" cy="502920"/>
+          </a:xfrm>
+          <a:prstGeom prst="rect">
+            <a:avLst/>
+          </a:prstGeom>
+          <a:noFill/>
+          <a:ln/>
+        </p:spPr>
+        <p:txBody>
+          <a:bodyPr wrap="square" rtlCol="0" anchor="t">
+            <a:normAutofit/>
+          </a:bodyPr>
+          <a:lstStyle/>
+          <a:p>
+            <a:pPr indent="0" marL="0">
+              <a:buNone/>
+            </a:pPr>
+            <a:r>
+              <a:rPr lang="en-US" sz="1300" dirty="0">
+                <a:solidFill>
+                  <a:srgbClr val="4A4A4A"/>
+                </a:solidFill>
+                <a:latin typeface="Arial" pitchFamily="34" charset="0"/>
+                <a:ea typeface="Arial" pitchFamily="34" charset="-122"/>
+                <a:cs typeface="Arial" pitchFamily="34" charset="-120"/>
+              </a:rPr>
+              <a:t>Les données 2025 sur les premières impressions et la confiance dans la marque.</a:t>
+            </a:r>
+            <a:endParaRPr lang="en-US" sz="1300" dirty="0"/>
+          </a:p>
+        </p:txBody>
+      </p:sp>
+      <p:sp>
+        <p:nvSpPr>
+          <p:cNvPr id="9" name="Text 7"/>
+          <p:cNvSpPr/>
+          <p:nvPr/>
+        </p:nvSpPr>
+        <p:spPr>
+          <a:xfrm>
+            <a:off x="457200" y="3986784"/>
+            <a:ext cx="10972800" cy="502920"/>
+          </a:xfrm>
+          <a:prstGeom prst="rect">
+            <a:avLst/>
+          </a:prstGeom>
+          <a:noFill/>
+          <a:ln/>
+        </p:spPr>
+        <p:txBody>
+          <a:bodyPr wrap="square" rtlCol="0" anchor="t">
+            <a:normAutofit/>
+          </a:bodyPr>
+          <a:lstStyle/>
+          <a:p>
+            <a:pPr indent="0" marL="0">
+              <a:buNone/>
+            </a:pPr>
+            <a:r>
+              <a:rPr lang="en-US" sz="1600" b="1" dirty="0">
+                <a:solidFill>
+                  <a:srgbClr val="1A1A1A"/>
+                </a:solidFill>
+                <a:latin typeface="Arial" pitchFamily="34" charset="0"/>
+                <a:ea typeface="Arial" pitchFamily="34" charset="-122"/>
+                <a:cs typeface="Arial" pitchFamily="34" charset="-120"/>
+              </a:rPr>
+              <a:t>Le produit</a:t>
+            </a:r>
+            <a:endParaRPr lang="en-US" sz="1600" dirty="0"/>
+          </a:p>
+        </p:txBody>
+      </p:sp>
+      <p:sp>
+        <p:nvSpPr>
+          <p:cNvPr id="10" name="Text 8"/>
+          <p:cNvSpPr/>
+          <p:nvPr/>
+        </p:nvSpPr>
+        <p:spPr>
+          <a:xfrm>
+            <a:off x="457200" y="4599432"/>
+            <a:ext cx="10972800" cy="502920"/>
+          </a:xfrm>
+          <a:prstGeom prst="rect">
+            <a:avLst/>
+          </a:prstGeom>
+          <a:noFill/>
+          <a:ln/>
+        </p:spPr>
+        <p:txBody>
+          <a:bodyPr wrap="square" rtlCol="0" anchor="t">
+            <a:normAutofit/>
+          </a:bodyPr>
+          <a:lstStyle/>
+          <a:p>
+            <a:pPr indent="0" marL="0">
+              <a:buNone/>
+            </a:pPr>
+            <a:r>
+              <a:rPr lang="en-US" sz="1300" dirty="0">
+                <a:solidFill>
+                  <a:srgbClr val="4A4A4A"/>
+                </a:solidFill>
+                <a:latin typeface="Arial" pitchFamily="34" charset="0"/>
+                <a:ea typeface="Arial" pitchFamily="34" charset="-122"/>
+                <a:cs typeface="Arial" pitchFamily="34" charset="-120"/>
+              </a:rPr>
+              <a:t>Ce que c'est, à qui c'est destiné et ce qui est inclus.</a:t>
+            </a:r>
+            <a:endParaRPr lang="en-US" sz="1300" dirty="0"/>
+          </a:p>
+        </p:txBody>
+      </p:sp>
+      <p:sp>
+        <p:nvSpPr>
+          <p:cNvPr id="11" name="Text 9"/>
+          <p:cNvSpPr/>
+          <p:nvPr/>
+        </p:nvSpPr>
+        <p:spPr>
+          <a:xfrm>
+            <a:off x="457200" y="5239512"/>
+            <a:ext cx="10972800" cy="502920"/>
+          </a:xfrm>
+          <a:prstGeom prst="rect">
+            <a:avLst/>
+          </a:prstGeom>
+          <a:noFill/>
+          <a:ln/>
+        </p:spPr>
+        <p:txBody>
+          <a:bodyPr wrap="square" rtlCol="0" anchor="t">
+            <a:normAutofit/>
+          </a:bodyPr>
+          <a:lstStyle/>
+          <a:p>
+            <a:pPr indent="0" marL="0">
+              <a:buNone/>
+            </a:pPr>
+            <a:r>
+              <a:rPr lang="en-US" sz="1600" b="1" dirty="0">
+                <a:solidFill>
+                  <a:srgbClr val="1A1A1A"/>
+                </a:solidFill>
+                <a:latin typeface="Arial" pitchFamily="34" charset="0"/>
+                <a:ea typeface="Arial" pitchFamily="34" charset="-122"/>
+                <a:cs typeface="Arial" pitchFamily="34" charset="-120"/>
+              </a:rPr>
+              <a:t>Le processus créatif</a:t>
+            </a:r>
+            <a:endParaRPr lang="en-US" sz="1600" dirty="0"/>
+          </a:p>
+        </p:txBody>
+      </p:sp>
+      <p:sp>
+        <p:nvSpPr>
+          <p:cNvPr id="12" name="Text 10"/>
+          <p:cNvSpPr/>
+          <p:nvPr/>
+        </p:nvSpPr>
+        <p:spPr>
+          <a:xfrm>
+            <a:off x="457200" y="5852160"/>
+            <a:ext cx="10972800" cy="502920"/>
+          </a:xfrm>
+          <a:prstGeom prst="rect">
+            <a:avLst/>
+          </a:prstGeom>
+          <a:noFill/>
+          <a:ln/>
+        </p:spPr>
+        <p:txBody>
+          <a:bodyPr wrap="square" rtlCol="0" anchor="t">
+            <a:normAutofit/>
+          </a:bodyPr>
+          <a:lstStyle/>
+          <a:p>
+            <a:pPr indent="0" marL="0">
+              <a:buNone/>
+            </a:pPr>
+            <a:r>
+              <a:rPr lang="en-US" sz="1300" dirty="0">
+                <a:solidFill>
+                  <a:srgbClr val="4A4A4A"/>
+                </a:solidFill>
+                <a:latin typeface="Arial" pitchFamily="34" charset="0"/>
+                <a:ea typeface="Arial" pitchFamily="34" charset="-122"/>
+                <a:cs typeface="Arial" pitchFamily="34" charset="-120"/>
+              </a:rPr>
+              <a:t>Du brief aux fichiers finaux en 2–3 semaines.</a:t>
+            </a:r>
+            <a:endParaRPr lang="en-US" sz="1300" dirty="0"/>
+          </a:p>
+        </p:txBody>
+      </p:sp>
     </p:spTree>
   </p:cSld>
   <p:clrMapOvr>
@@ -2822,6 +4099,375 @@
           </a:p>
         </p:txBody>
       </p:sp>
+      <p:sp>
+        <p:nvSpPr>
+          <p:cNvPr id="4" name="Text 2"/>
+          <p:cNvSpPr/>
+          <p:nvPr/>
+        </p:nvSpPr>
+        <p:spPr>
+          <a:xfrm>
+            <a:off x="457200" y="868680"/>
+            <a:ext cx="10972800" cy="502920"/>
+          </a:xfrm>
+          <a:prstGeom prst="rect">
+            <a:avLst/>
+          </a:prstGeom>
+          <a:noFill/>
+          <a:ln/>
+        </p:spPr>
+        <p:txBody>
+          <a:bodyPr wrap="square" rtlCol="0" anchor="t">
+            <a:normAutofit/>
+          </a:bodyPr>
+          <a:lstStyle/>
+          <a:p>
+            <a:pPr indent="0" marL="0">
+              <a:buNone/>
+            </a:pPr>
+            <a:r>
+              <a:rPr lang="en-US" sz="2200" b="1" dirty="0">
+                <a:solidFill>
+                  <a:srgbClr val="1A1A1A"/>
+                </a:solidFill>
+                <a:latin typeface="Arial" pitchFamily="34" charset="0"/>
+                <a:ea typeface="Arial" pitchFamily="34" charset="-122"/>
+                <a:cs typeface="Arial" pitchFamily="34" charset="-120"/>
+              </a:rPr>
+              <a:t>Pourquoi les logos comptent</a:t>
+            </a:r>
+            <a:endParaRPr lang="en-US" sz="2200" dirty="0"/>
+          </a:p>
+        </p:txBody>
+      </p:sp>
+      <p:sp>
+        <p:nvSpPr>
+          <p:cNvPr id="5" name="Text 3"/>
+          <p:cNvSpPr/>
+          <p:nvPr/>
+        </p:nvSpPr>
+        <p:spPr>
+          <a:xfrm>
+            <a:off x="457200" y="1481328"/>
+            <a:ext cx="10972800" cy="668528"/>
+          </a:xfrm>
+          <a:prstGeom prst="rect">
+            <a:avLst/>
+          </a:prstGeom>
+          <a:noFill/>
+          <a:ln/>
+        </p:spPr>
+        <p:txBody>
+          <a:bodyPr wrap="square" rtlCol="0" anchor="t">
+            <a:normAutofit/>
+          </a:bodyPr>
+          <a:lstStyle/>
+          <a:p>
+            <a:pPr indent="0" marL="0">
+              <a:buNone/>
+            </a:pPr>
+            <a:r>
+              <a:rPr lang="en-US" sz="2200" b="1" dirty="0">
+                <a:solidFill>
+                  <a:srgbClr val="1A1A1A"/>
+                </a:solidFill>
+                <a:latin typeface="Arial" pitchFamily="34" charset="0"/>
+                <a:ea typeface="Arial" pitchFamily="34" charset="-122"/>
+                <a:cs typeface="Arial" pitchFamily="34" charset="-120"/>
+              </a:rPr>
+              <a:t>Le temps que prennent les consommateurs pour se faire une première impression d'une entreprise.</a:t>
+            </a:r>
+            <a:endParaRPr lang="en-US" sz="2200" dirty="0"/>
+          </a:p>
+        </p:txBody>
+      </p:sp>
+      <p:sp>
+        <p:nvSpPr>
+          <p:cNvPr id="6" name="Text 4"/>
+          <p:cNvSpPr/>
+          <p:nvPr/>
+        </p:nvSpPr>
+        <p:spPr>
+          <a:xfrm>
+            <a:off x="457200" y="2259584"/>
+            <a:ext cx="10972800" cy="502920"/>
+          </a:xfrm>
+          <a:prstGeom prst="rect">
+            <a:avLst/>
+          </a:prstGeom>
+          <a:noFill/>
+          <a:ln/>
+        </p:spPr>
+        <p:txBody>
+          <a:bodyPr wrap="square" rtlCol="0" anchor="t">
+            <a:normAutofit/>
+          </a:bodyPr>
+          <a:lstStyle/>
+          <a:p>
+            <a:pPr indent="0" marL="0">
+              <a:buNone/>
+            </a:pPr>
+            <a:r>
+              <a:rPr lang="en-US" sz="1300" dirty="0">
+                <a:solidFill>
+                  <a:srgbClr val="4A4A4A"/>
+                </a:solidFill>
+                <a:latin typeface="Arial" pitchFamily="34" charset="0"/>
+                <a:ea typeface="Arial" pitchFamily="34" charset="-122"/>
+                <a:cs typeface="Arial" pitchFamily="34" charset="-120"/>
+              </a:rPr>
+              <a:t>Un logo professionnel est le signal visuel le plus fort qui façonne cette impression — et le cerveau décide à cet instant s'il fait confiance à une entreprise.</a:t>
+            </a:r>
+            <a:endParaRPr lang="en-US" sz="1300" dirty="0"/>
+          </a:p>
+        </p:txBody>
+      </p:sp>
+      <p:sp>
+        <p:nvSpPr>
+          <p:cNvPr id="7" name="Text 5"/>
+          <p:cNvSpPr/>
+          <p:nvPr/>
+        </p:nvSpPr>
+        <p:spPr>
+          <a:xfrm>
+            <a:off x="457200" y="2899664"/>
+            <a:ext cx="10972800" cy="502920"/>
+          </a:xfrm>
+          <a:prstGeom prst="rect">
+            <a:avLst/>
+          </a:prstGeom>
+          <a:noFill/>
+          <a:ln/>
+        </p:spPr>
+        <p:txBody>
+          <a:bodyPr wrap="square" rtlCol="0" anchor="t">
+            <a:normAutofit/>
+          </a:bodyPr>
+          <a:lstStyle/>
+          <a:p>
+            <a:pPr indent="0" marL="0">
+              <a:buNone/>
+            </a:pPr>
+            <a:r>
+              <a:rPr lang="en-US" sz="1600" b="1" dirty="0">
+                <a:solidFill>
+                  <a:srgbClr val="1A1A1A"/>
+                </a:solidFill>
+                <a:latin typeface="Arial" pitchFamily="34" charset="0"/>
+                <a:ea typeface="Arial" pitchFamily="34" charset="-122"/>
+                <a:cs typeface="Arial" pitchFamily="34" charset="-120"/>
+              </a:rPr>
+              <a:t>Hausse de reconnaissance</a:t>
+            </a:r>
+            <a:endParaRPr lang="en-US" sz="1600" dirty="0"/>
+          </a:p>
+        </p:txBody>
+      </p:sp>
+      <p:sp>
+        <p:nvSpPr>
+          <p:cNvPr id="8" name="Text 6"/>
+          <p:cNvSpPr/>
+          <p:nvPr/>
+        </p:nvSpPr>
+        <p:spPr>
+          <a:xfrm>
+            <a:off x="457200" y="3512312"/>
+            <a:ext cx="10972800" cy="502920"/>
+          </a:xfrm>
+          <a:prstGeom prst="rect">
+            <a:avLst/>
+          </a:prstGeom>
+          <a:noFill/>
+          <a:ln/>
+        </p:spPr>
+        <p:txBody>
+          <a:bodyPr wrap="square" rtlCol="0" anchor="t">
+            <a:normAutofit/>
+          </a:bodyPr>
+          <a:lstStyle/>
+          <a:p>
+            <a:pPr indent="0" marL="0">
+              <a:buNone/>
+            </a:pPr>
+            <a:r>
+              <a:rPr lang="en-US" sz="1300" dirty="0">
+                <a:solidFill>
+                  <a:srgbClr val="4A4A4A"/>
+                </a:solidFill>
+                <a:latin typeface="Arial" pitchFamily="34" charset="0"/>
+                <a:ea typeface="Arial" pitchFamily="34" charset="-122"/>
+                <a:cs typeface="Arial" pitchFamily="34" charset="-120"/>
+              </a:rPr>
+              <a:t>Hausse de la reconnaissance de marque grâce à un logo bien conçu.</a:t>
+            </a:r>
+            <a:endParaRPr lang="en-US" sz="1300" dirty="0"/>
+          </a:p>
+        </p:txBody>
+      </p:sp>
+      <p:sp>
+        <p:nvSpPr>
+          <p:cNvPr id="9" name="Text 7"/>
+          <p:cNvSpPr/>
+          <p:nvPr/>
+        </p:nvSpPr>
+        <p:spPr>
+          <a:xfrm>
+            <a:off x="457200" y="4152392"/>
+            <a:ext cx="10972800" cy="502920"/>
+          </a:xfrm>
+          <a:prstGeom prst="rect">
+            <a:avLst/>
+          </a:prstGeom>
+          <a:noFill/>
+          <a:ln/>
+        </p:spPr>
+        <p:txBody>
+          <a:bodyPr wrap="square" rtlCol="0" anchor="t">
+            <a:normAutofit/>
+          </a:bodyPr>
+          <a:lstStyle/>
+          <a:p>
+            <a:pPr indent="0" marL="0">
+              <a:buNone/>
+            </a:pPr>
+            <a:r>
+              <a:rPr lang="en-US" sz="1600" b="1" dirty="0">
+                <a:solidFill>
+                  <a:srgbClr val="1A1A1A"/>
+                </a:solidFill>
+                <a:latin typeface="Arial" pitchFamily="34" charset="0"/>
+                <a:ea typeface="Arial" pitchFamily="34" charset="-122"/>
+                <a:cs typeface="Arial" pitchFamily="34" charset="-120"/>
+              </a:rPr>
+              <a:t>Hausse de confiance</a:t>
+            </a:r>
+            <a:endParaRPr lang="en-US" sz="1600" dirty="0"/>
+          </a:p>
+        </p:txBody>
+      </p:sp>
+      <p:sp>
+        <p:nvSpPr>
+          <p:cNvPr id="10" name="Text 8"/>
+          <p:cNvSpPr/>
+          <p:nvPr/>
+        </p:nvSpPr>
+        <p:spPr>
+          <a:xfrm>
+            <a:off x="457200" y="4765040"/>
+            <a:ext cx="10972800" cy="502920"/>
+          </a:xfrm>
+          <a:prstGeom prst="rect">
+            <a:avLst/>
+          </a:prstGeom>
+          <a:noFill/>
+          <a:ln/>
+        </p:spPr>
+        <p:txBody>
+          <a:bodyPr wrap="square" rtlCol="0" anchor="t">
+            <a:normAutofit/>
+          </a:bodyPr>
+          <a:lstStyle/>
+          <a:p>
+            <a:pPr indent="0" marL="0">
+              <a:buNone/>
+            </a:pPr>
+            <a:r>
+              <a:rPr lang="en-US" sz="1300" dirty="0">
+                <a:solidFill>
+                  <a:srgbClr val="4A4A4A"/>
+                </a:solidFill>
+                <a:latin typeface="Arial" pitchFamily="34" charset="0"/>
+                <a:ea typeface="Arial" pitchFamily="34" charset="-122"/>
+                <a:cs typeface="Arial" pitchFamily="34" charset="-120"/>
+              </a:rPr>
+              <a:t>Hausse de confiance ressentie par les prospects après avoir vu un logo soigné.</a:t>
+            </a:r>
+            <a:endParaRPr lang="en-US" sz="1300" dirty="0"/>
+          </a:p>
+        </p:txBody>
+      </p:sp>
+      <p:sp>
+        <p:nvSpPr>
+          <p:cNvPr id="11" name="Text 9"/>
+          <p:cNvSpPr/>
+          <p:nvPr/>
+        </p:nvSpPr>
+        <p:spPr>
+          <a:xfrm>
+            <a:off x="457200" y="5405120"/>
+            <a:ext cx="10972800" cy="502920"/>
+          </a:xfrm>
+          <a:prstGeom prst="rect">
+            <a:avLst/>
+          </a:prstGeom>
+          <a:noFill/>
+          <a:ln/>
+        </p:spPr>
+        <p:txBody>
+          <a:bodyPr wrap="square" rtlCol="0" anchor="t">
+            <a:normAutofit/>
+          </a:bodyPr>
+          <a:lstStyle/>
+          <a:p>
+            <a:pPr indent="0" marL="0">
+              <a:buNone/>
+            </a:pPr>
+            <a:r>
+              <a:rPr lang="en-US" sz="1600" b="1" dirty="0">
+                <a:solidFill>
+                  <a:srgbClr val="1A1A1A"/>
+                </a:solidFill>
+                <a:latin typeface="Arial" pitchFamily="34" charset="0"/>
+                <a:ea typeface="Arial" pitchFamily="34" charset="-122"/>
+                <a:cs typeface="Arial" pitchFamily="34" charset="-120"/>
+              </a:rPr>
+              <a:t>Poids de l'impression</a:t>
+            </a:r>
+            <a:endParaRPr lang="en-US" sz="1600" dirty="0"/>
+          </a:p>
+        </p:txBody>
+      </p:sp>
+      <p:sp>
+        <p:nvSpPr>
+          <p:cNvPr id="12" name="Text 10"/>
+          <p:cNvSpPr/>
+          <p:nvPr/>
+        </p:nvSpPr>
+        <p:spPr>
+          <a:xfrm>
+            <a:off x="457200" y="6017768"/>
+            <a:ext cx="10972800" cy="502920"/>
+          </a:xfrm>
+          <a:prstGeom prst="rect">
+            <a:avLst/>
+          </a:prstGeom>
+          <a:noFill/>
+          <a:ln/>
+        </p:spPr>
+        <p:txBody>
+          <a:bodyPr wrap="square" rtlCol="0" anchor="t">
+            <a:normAutofit/>
+          </a:bodyPr>
+          <a:lstStyle/>
+          <a:p>
+            <a:pPr indent="0" marL="0">
+              <a:buNone/>
+            </a:pPr>
+            <a:r>
+              <a:rPr lang="en-US" sz="1300" dirty="0">
+                <a:solidFill>
+                  <a:srgbClr val="4A4A4A"/>
+                </a:solidFill>
+                <a:latin typeface="Arial" pitchFamily="34" charset="0"/>
+                <a:ea typeface="Arial" pitchFamily="34" charset="-122"/>
+                <a:cs typeface="Arial" pitchFamily="34" charset="-120"/>
+              </a:rPr>
+              <a:t>Part du poids de la première impression apportée par la seule couleur du logo.</a:t>
+            </a:r>
+            <a:endParaRPr lang="en-US" sz="1300" dirty="0"/>
+          </a:p>
+        </p:txBody>
+      </p:sp>
     </p:spTree>
   </p:cSld>
   <p:clrMapOvr>
@@ -2932,6 +4578,375 @@
           </a:p>
         </p:txBody>
       </p:sp>
+      <p:sp>
+        <p:nvSpPr>
+          <p:cNvPr id="4" name="Text 2"/>
+          <p:cNvSpPr/>
+          <p:nvPr/>
+        </p:nvSpPr>
+        <p:spPr>
+          <a:xfrm>
+            <a:off x="457200" y="868680"/>
+            <a:ext cx="10972800" cy="502920"/>
+          </a:xfrm>
+          <a:prstGeom prst="rect">
+            <a:avLst/>
+          </a:prstGeom>
+          <a:noFill/>
+          <a:ln/>
+        </p:spPr>
+        <p:txBody>
+          <a:bodyPr wrap="square" rtlCol="0" anchor="t">
+            <a:normAutofit/>
+          </a:bodyPr>
+          <a:lstStyle/>
+          <a:p>
+            <a:pPr indent="0" marL="0">
+              <a:buNone/>
+            </a:pPr>
+            <a:r>
+              <a:rPr lang="en-US" sz="2200" b="1" dirty="0">
+                <a:solidFill>
+                  <a:srgbClr val="1A1A1A"/>
+                </a:solidFill>
+                <a:latin typeface="Arial" pitchFamily="34" charset="0"/>
+                <a:ea typeface="Arial" pitchFamily="34" charset="-122"/>
+                <a:cs typeface="Arial" pitchFamily="34" charset="-120"/>
+              </a:rPr>
+              <a:t>Ce qui est en jeu</a:t>
+            </a:r>
+            <a:endParaRPr lang="en-US" sz="2200" dirty="0"/>
+          </a:p>
+        </p:txBody>
+      </p:sp>
+      <p:sp>
+        <p:nvSpPr>
+          <p:cNvPr id="5" name="Text 3"/>
+          <p:cNvSpPr/>
+          <p:nvPr/>
+        </p:nvSpPr>
+        <p:spPr>
+          <a:xfrm>
+            <a:off x="457200" y="1481328"/>
+            <a:ext cx="10972800" cy="502920"/>
+          </a:xfrm>
+          <a:prstGeom prst="rect">
+            <a:avLst/>
+          </a:prstGeom>
+          <a:noFill/>
+          <a:ln/>
+        </p:spPr>
+        <p:txBody>
+          <a:bodyPr wrap="square" rtlCol="0" anchor="t">
+            <a:normAutofit/>
+          </a:bodyPr>
+          <a:lstStyle/>
+          <a:p>
+            <a:pPr indent="0" marL="0">
+              <a:buNone/>
+            </a:pPr>
+            <a:r>
+              <a:rPr lang="en-US" sz="2200" b="1" dirty="0">
+                <a:solidFill>
+                  <a:srgbClr val="1A1A1A"/>
+                </a:solidFill>
+                <a:latin typeface="Arial" pitchFamily="34" charset="0"/>
+                <a:ea typeface="Arial" pitchFamily="34" charset="-122"/>
+                <a:cs typeface="Arial" pitchFamily="34" charset="-120"/>
+              </a:rPr>
+              <a:t>Le coût d'un logo faible ou absent.</a:t>
+            </a:r>
+            <a:endParaRPr lang="en-US" sz="2200" dirty="0"/>
+          </a:p>
+        </p:txBody>
+      </p:sp>
+      <p:sp>
+        <p:nvSpPr>
+          <p:cNvPr id="6" name="Text 4"/>
+          <p:cNvSpPr/>
+          <p:nvPr/>
+        </p:nvSpPr>
+        <p:spPr>
+          <a:xfrm>
+            <a:off x="457200" y="2093976"/>
+            <a:ext cx="10972800" cy="502920"/>
+          </a:xfrm>
+          <a:prstGeom prst="rect">
+            <a:avLst/>
+          </a:prstGeom>
+          <a:noFill/>
+          <a:ln/>
+        </p:spPr>
+        <p:txBody>
+          <a:bodyPr wrap="square" rtlCol="0" anchor="t">
+            <a:normAutofit/>
+          </a:bodyPr>
+          <a:lstStyle/>
+          <a:p>
+            <a:pPr indent="0" marL="0">
+              <a:buNone/>
+            </a:pPr>
+            <a:r>
+              <a:rPr lang="en-US" sz="1600" b="1" dirty="0">
+                <a:solidFill>
+                  <a:srgbClr val="1A1A1A"/>
+                </a:solidFill>
+                <a:latin typeface="Arial" pitchFamily="34" charset="0"/>
+                <a:ea typeface="Arial" pitchFamily="34" charset="-122"/>
+                <a:cs typeface="Arial" pitchFamily="34" charset="-120"/>
+              </a:rPr>
+              <a:t>Coût 01</a:t>
+            </a:r>
+            <a:endParaRPr lang="en-US" sz="1600" dirty="0"/>
+          </a:p>
+        </p:txBody>
+      </p:sp>
+      <p:sp>
+        <p:nvSpPr>
+          <p:cNvPr id="7" name="Text 5"/>
+          <p:cNvSpPr/>
+          <p:nvPr/>
+        </p:nvSpPr>
+        <p:spPr>
+          <a:xfrm>
+            <a:off x="457200" y="2706624"/>
+            <a:ext cx="10972800" cy="502920"/>
+          </a:xfrm>
+          <a:prstGeom prst="rect">
+            <a:avLst/>
+          </a:prstGeom>
+          <a:noFill/>
+          <a:ln/>
+        </p:spPr>
+        <p:txBody>
+          <a:bodyPr wrap="square" rtlCol="0" anchor="t">
+            <a:normAutofit/>
+          </a:bodyPr>
+          <a:lstStyle/>
+          <a:p>
+            <a:pPr indent="0" marL="0">
+              <a:buNone/>
+            </a:pPr>
+            <a:r>
+              <a:rPr lang="en-US" sz="1600" b="1" dirty="0">
+                <a:solidFill>
+                  <a:srgbClr val="1A1A1A"/>
+                </a:solidFill>
+                <a:latin typeface="Arial" pitchFamily="34" charset="0"/>
+                <a:ea typeface="Arial" pitchFamily="34" charset="-122"/>
+                <a:cs typeface="Arial" pitchFamily="34" charset="-120"/>
+              </a:rPr>
+              <a:t>Crédibilité perdue</a:t>
+            </a:r>
+            <a:endParaRPr lang="en-US" sz="1600" dirty="0"/>
+          </a:p>
+        </p:txBody>
+      </p:sp>
+      <p:sp>
+        <p:nvSpPr>
+          <p:cNvPr id="8" name="Text 6"/>
+          <p:cNvSpPr/>
+          <p:nvPr/>
+        </p:nvSpPr>
+        <p:spPr>
+          <a:xfrm>
+            <a:off x="457200" y="3319272"/>
+            <a:ext cx="10972800" cy="502920"/>
+          </a:xfrm>
+          <a:prstGeom prst="rect">
+            <a:avLst/>
+          </a:prstGeom>
+          <a:noFill/>
+          <a:ln/>
+        </p:spPr>
+        <p:txBody>
+          <a:bodyPr wrap="square" rtlCol="0" anchor="t">
+            <a:normAutofit/>
+          </a:bodyPr>
+          <a:lstStyle/>
+          <a:p>
+            <a:pPr indent="0" marL="0">
+              <a:buNone/>
+            </a:pPr>
+            <a:r>
+              <a:rPr lang="en-US" sz="1300" dirty="0">
+                <a:solidFill>
+                  <a:srgbClr val="4A4A4A"/>
+                </a:solidFill>
+                <a:latin typeface="Arial" pitchFamily="34" charset="0"/>
+                <a:ea typeface="Arial" pitchFamily="34" charset="-122"/>
+                <a:cs typeface="Arial" pitchFamily="34" charset="-120"/>
+              </a:rPr>
+              <a:t>Un logo donne à une entreprise un air établi. Sans cela, les prospects choisissent le concurrent qui paraît plus professionnel.</a:t>
+            </a:r>
+            <a:endParaRPr lang="en-US" sz="1300" dirty="0"/>
+          </a:p>
+        </p:txBody>
+      </p:sp>
+      <p:sp>
+        <p:nvSpPr>
+          <p:cNvPr id="9" name="Text 7"/>
+          <p:cNvSpPr/>
+          <p:nvPr/>
+        </p:nvSpPr>
+        <p:spPr>
+          <a:xfrm>
+            <a:off x="457200" y="3959352"/>
+            <a:ext cx="10972800" cy="502920"/>
+          </a:xfrm>
+          <a:prstGeom prst="rect">
+            <a:avLst/>
+          </a:prstGeom>
+          <a:noFill/>
+          <a:ln/>
+        </p:spPr>
+        <p:txBody>
+          <a:bodyPr wrap="square" rtlCol="0" anchor="t">
+            <a:normAutofit/>
+          </a:bodyPr>
+          <a:lstStyle/>
+          <a:p>
+            <a:pPr indent="0" marL="0">
+              <a:buNone/>
+            </a:pPr>
+            <a:r>
+              <a:rPr lang="en-US" sz="1600" b="1" dirty="0">
+                <a:solidFill>
+                  <a:srgbClr val="1A1A1A"/>
+                </a:solidFill>
+                <a:latin typeface="Arial" pitchFamily="34" charset="0"/>
+                <a:ea typeface="Arial" pitchFamily="34" charset="-122"/>
+                <a:cs typeface="Arial" pitchFamily="34" charset="-120"/>
+              </a:rPr>
+              <a:t>Coût 02</a:t>
+            </a:r>
+            <a:endParaRPr lang="en-US" sz="1600" dirty="0"/>
+          </a:p>
+        </p:txBody>
+      </p:sp>
+      <p:sp>
+        <p:nvSpPr>
+          <p:cNvPr id="10" name="Text 8"/>
+          <p:cNvSpPr/>
+          <p:nvPr/>
+        </p:nvSpPr>
+        <p:spPr>
+          <a:xfrm>
+            <a:off x="457200" y="4572000"/>
+            <a:ext cx="10972800" cy="502920"/>
+          </a:xfrm>
+          <a:prstGeom prst="rect">
+            <a:avLst/>
+          </a:prstGeom>
+          <a:noFill/>
+          <a:ln/>
+        </p:spPr>
+        <p:txBody>
+          <a:bodyPr wrap="square" rtlCol="0" anchor="t">
+            <a:normAutofit/>
+          </a:bodyPr>
+          <a:lstStyle/>
+          <a:p>
+            <a:pPr indent="0" marL="0">
+              <a:buNone/>
+            </a:pPr>
+            <a:r>
+              <a:rPr lang="en-US" sz="1600" b="1" dirty="0">
+                <a:solidFill>
+                  <a:srgbClr val="1A1A1A"/>
+                </a:solidFill>
+                <a:latin typeface="Arial" pitchFamily="34" charset="0"/>
+                <a:ea typeface="Arial" pitchFamily="34" charset="-122"/>
+                <a:cs typeface="Arial" pitchFamily="34" charset="-120"/>
+              </a:rPr>
+              <a:t>Différenciation manquée</a:t>
+            </a:r>
+            <a:endParaRPr lang="en-US" sz="1600" dirty="0"/>
+          </a:p>
+        </p:txBody>
+      </p:sp>
+      <p:sp>
+        <p:nvSpPr>
+          <p:cNvPr id="11" name="Text 9"/>
+          <p:cNvSpPr/>
+          <p:nvPr/>
+        </p:nvSpPr>
+        <p:spPr>
+          <a:xfrm>
+            <a:off x="457200" y="5184648"/>
+            <a:ext cx="10972800" cy="502920"/>
+          </a:xfrm>
+          <a:prstGeom prst="rect">
+            <a:avLst/>
+          </a:prstGeom>
+          <a:noFill/>
+          <a:ln/>
+        </p:spPr>
+        <p:txBody>
+          <a:bodyPr wrap="square" rtlCol="0" anchor="t">
+            <a:normAutofit/>
+          </a:bodyPr>
+          <a:lstStyle/>
+          <a:p>
+            <a:pPr indent="0" marL="0">
+              <a:buNone/>
+            </a:pPr>
+            <a:r>
+              <a:rPr lang="en-US" sz="1300" dirty="0">
+                <a:solidFill>
+                  <a:srgbClr val="4A4A4A"/>
+                </a:solidFill>
+                <a:latin typeface="Arial" pitchFamily="34" charset="0"/>
+                <a:ea typeface="Arial" pitchFamily="34" charset="-122"/>
+                <a:cs typeface="Arial" pitchFamily="34" charset="-120"/>
+              </a:rPr>
+              <a:t>Les logos sont la façon dont les clients distinguent une entreprise d'une autre. Une marque générique ou absente signifie que les clients ne peuvent pas vous trouver.</a:t>
+            </a:r>
+            <a:endParaRPr lang="en-US" sz="1300" dirty="0"/>
+          </a:p>
+        </p:txBody>
+      </p:sp>
+      <p:sp>
+        <p:nvSpPr>
+          <p:cNvPr id="12" name="Text 10"/>
+          <p:cNvSpPr/>
+          <p:nvPr/>
+        </p:nvSpPr>
+        <p:spPr>
+          <a:xfrm>
+            <a:off x="457200" y="5824728"/>
+            <a:ext cx="10972800" cy="502920"/>
+          </a:xfrm>
+          <a:prstGeom prst="rect">
+            <a:avLst/>
+          </a:prstGeom>
+          <a:noFill/>
+          <a:ln/>
+        </p:spPr>
+        <p:txBody>
+          <a:bodyPr wrap="square" rtlCol="0" anchor="t">
+            <a:normAutofit/>
+          </a:bodyPr>
+          <a:lstStyle/>
+          <a:p>
+            <a:pPr indent="0" marL="0">
+              <a:buNone/>
+            </a:pPr>
+            <a:r>
+              <a:rPr lang="en-US" sz="1600" b="1" dirty="0">
+                <a:solidFill>
+                  <a:srgbClr val="1A1A1A"/>
+                </a:solidFill>
+                <a:latin typeface="Arial" pitchFamily="34" charset="0"/>
+                <a:ea typeface="Arial" pitchFamily="34" charset="-122"/>
+                <a:cs typeface="Arial" pitchFamily="34" charset="-120"/>
+              </a:rPr>
+              <a:t>Coût 03</a:t>
+            </a:r>
+            <a:endParaRPr lang="en-US" sz="1600" dirty="0"/>
+          </a:p>
+        </p:txBody>
+      </p:sp>
     </p:spTree>
   </p:cSld>
   <p:clrMapOvr>
@@ -3042,9 +5057,378 @@
           </a:p>
         </p:txBody>
       </p:sp>
+      <p:sp>
+        <p:nvSpPr>
+          <p:cNvPr id="4" name="Text 2"/>
+          <p:cNvSpPr/>
+          <p:nvPr/>
+        </p:nvSpPr>
+        <p:spPr>
+          <a:xfrm>
+            <a:off x="457200" y="868680"/>
+            <a:ext cx="6949440" cy="502920"/>
+          </a:xfrm>
+          <a:prstGeom prst="rect">
+            <a:avLst/>
+          </a:prstGeom>
+          <a:noFill/>
+          <a:ln/>
+        </p:spPr>
+        <p:txBody>
+          <a:bodyPr wrap="square" rtlCol="0" anchor="t">
+            <a:normAutofit/>
+          </a:bodyPr>
+          <a:lstStyle/>
+          <a:p>
+            <a:pPr indent="0" marL="0">
+              <a:buNone/>
+            </a:pPr>
+            <a:r>
+              <a:rPr lang="en-US" sz="2200" b="1" dirty="0">
+                <a:solidFill>
+                  <a:srgbClr val="1A1A1A"/>
+                </a:solidFill>
+                <a:latin typeface="Arial" pitchFamily="34" charset="0"/>
+                <a:ea typeface="Arial" pitchFamily="34" charset="-122"/>
+                <a:cs typeface="Arial" pitchFamily="34" charset="-120"/>
+              </a:rPr>
+              <a:t>Le produit</a:t>
+            </a:r>
+            <a:endParaRPr lang="en-US" sz="2200" dirty="0"/>
+          </a:p>
+        </p:txBody>
+      </p:sp>
+      <p:sp>
+        <p:nvSpPr>
+          <p:cNvPr id="5" name="Text 3"/>
+          <p:cNvSpPr/>
+          <p:nvPr/>
+        </p:nvSpPr>
+        <p:spPr>
+          <a:xfrm>
+            <a:off x="457200" y="1481328"/>
+            <a:ext cx="6949440" cy="502920"/>
+          </a:xfrm>
+          <a:prstGeom prst="rect">
+            <a:avLst/>
+          </a:prstGeom>
+          <a:noFill/>
+          <a:ln/>
+        </p:spPr>
+        <p:txBody>
+          <a:bodyPr wrap="square" rtlCol="0" anchor="t">
+            <a:normAutofit/>
+          </a:bodyPr>
+          <a:lstStyle/>
+          <a:p>
+            <a:pPr indent="0" marL="0">
+              <a:buNone/>
+            </a:pPr>
+            <a:r>
+              <a:rPr lang="en-US" sz="2200" b="1" dirty="0">
+                <a:solidFill>
+                  <a:srgbClr val="1A1A1A"/>
+                </a:solidFill>
+                <a:latin typeface="Arial" pitchFamily="34" charset="0"/>
+                <a:ea typeface="Arial" pitchFamily="34" charset="-122"/>
+                <a:cs typeface="Arial" pitchFamily="34" charset="-120"/>
+              </a:rPr>
+              <a:t>Ce qui le rend différent.</a:t>
+            </a:r>
+            <a:endParaRPr lang="en-US" sz="2200" dirty="0"/>
+          </a:p>
+        </p:txBody>
+      </p:sp>
+      <p:sp>
+        <p:nvSpPr>
+          <p:cNvPr id="6" name="Text 4"/>
+          <p:cNvSpPr/>
+          <p:nvPr/>
+        </p:nvSpPr>
+        <p:spPr>
+          <a:xfrm>
+            <a:off x="457200" y="2093976"/>
+            <a:ext cx="6949440" cy="502920"/>
+          </a:xfrm>
+          <a:prstGeom prst="rect">
+            <a:avLst/>
+          </a:prstGeom>
+          <a:noFill/>
+          <a:ln/>
+        </p:spPr>
+        <p:txBody>
+          <a:bodyPr wrap="square" rtlCol="0" anchor="t">
+            <a:normAutofit/>
+          </a:bodyPr>
+          <a:lstStyle/>
+          <a:p>
+            <a:pPr indent="0" marL="0">
+              <a:buNone/>
+            </a:pPr>
+            <a:r>
+              <a:rPr lang="en-US" sz="1300" dirty="0">
+                <a:solidFill>
+                  <a:srgbClr val="4A4A4A"/>
+                </a:solidFill>
+                <a:latin typeface="Arial" pitchFamily="34" charset="0"/>
+                <a:ea typeface="Arial" pitchFamily="34" charset="-122"/>
+                <a:cs typeface="Arial" pitchFamily="34" charset="-120"/>
+              </a:rPr>
+              <a:t>Quatre fondamentaux du produit qui distinguent la Conception de Logo Professionnel des outils gratuits, freelances et générateurs IA.</a:t>
+            </a:r>
+            <a:endParaRPr lang="en-US" sz="1300" dirty="0"/>
+          </a:p>
+        </p:txBody>
+      </p:sp>
+      <p:sp>
+        <p:nvSpPr>
+          <p:cNvPr id="7" name="Text 5"/>
+          <p:cNvSpPr/>
+          <p:nvPr/>
+        </p:nvSpPr>
+        <p:spPr>
+          <a:xfrm>
+            <a:off x="457200" y="2734056"/>
+            <a:ext cx="6949440" cy="502920"/>
+          </a:xfrm>
+          <a:prstGeom prst="rect">
+            <a:avLst/>
+          </a:prstGeom>
+          <a:noFill/>
+          <a:ln/>
+        </p:spPr>
+        <p:txBody>
+          <a:bodyPr wrap="square" rtlCol="0" anchor="t">
+            <a:normAutofit/>
+          </a:bodyPr>
+          <a:lstStyle/>
+          <a:p>
+            <a:pPr indent="0" marL="0">
+              <a:buNone/>
+            </a:pPr>
+            <a:r>
+              <a:rPr lang="en-US" sz="1600" b="1" dirty="0">
+                <a:solidFill>
+                  <a:srgbClr val="1A1A1A"/>
+                </a:solidFill>
+                <a:latin typeface="Arial" pitchFamily="34" charset="0"/>
+                <a:ea typeface="Arial" pitchFamily="34" charset="-122"/>
+                <a:cs typeface="Arial" pitchFamily="34" charset="-120"/>
+              </a:rPr>
+              <a:t>Des personnes, pas des prompts.</a:t>
+            </a:r>
+            <a:endParaRPr lang="en-US" sz="1600" dirty="0"/>
+          </a:p>
+        </p:txBody>
+      </p:sp>
+      <p:sp>
+        <p:nvSpPr>
+          <p:cNvPr id="8" name="Text 6"/>
+          <p:cNvSpPr/>
+          <p:nvPr/>
+        </p:nvSpPr>
+        <p:spPr>
+          <a:xfrm>
+            <a:off x="457200" y="3346704"/>
+            <a:ext cx="6949440" cy="605028"/>
+          </a:xfrm>
+          <a:prstGeom prst="rect">
+            <a:avLst/>
+          </a:prstGeom>
+          <a:noFill/>
+          <a:ln/>
+        </p:spPr>
+        <p:txBody>
+          <a:bodyPr wrap="square" rtlCol="0" anchor="t">
+            <a:normAutofit/>
+          </a:bodyPr>
+          <a:lstStyle/>
+          <a:p>
+            <a:pPr indent="0" marL="0">
+              <a:buNone/>
+            </a:pPr>
+            <a:r>
+              <a:rPr lang="en-US" sz="1300" dirty="0">
+                <a:solidFill>
+                  <a:srgbClr val="4A4A4A"/>
+                </a:solidFill>
+                <a:latin typeface="Arial" pitchFamily="34" charset="0"/>
+                <a:ea typeface="Arial" pitchFamily="34" charset="-122"/>
+                <a:cs typeface="Arial" pitchFamily="34" charset="-120"/>
+              </a:rPr>
+              <a:t>Plus de dix ans d'expérience et plus de 75 000 logos livrés. En 2025, 20% des logos sont générés par IA — ce qui rend les marques conçues par des humains plus différenciées, pas moins.</a:t>
+            </a:r>
+            <a:endParaRPr lang="en-US" sz="1300" dirty="0"/>
+          </a:p>
+        </p:txBody>
+      </p:sp>
+      <p:sp>
+        <p:nvSpPr>
+          <p:cNvPr id="9" name="Text 7"/>
+          <p:cNvSpPr/>
+          <p:nvPr/>
+        </p:nvSpPr>
+        <p:spPr>
+          <a:xfrm>
+            <a:off x="457200" y="4088892"/>
+            <a:ext cx="6949440" cy="502920"/>
+          </a:xfrm>
+          <a:prstGeom prst="rect">
+            <a:avLst/>
+          </a:prstGeom>
+          <a:noFill/>
+          <a:ln/>
+        </p:spPr>
+        <p:txBody>
+          <a:bodyPr wrap="square" rtlCol="0" anchor="t">
+            <a:normAutofit/>
+          </a:bodyPr>
+          <a:lstStyle/>
+          <a:p>
+            <a:pPr indent="0" marL="0">
+              <a:buNone/>
+            </a:pPr>
+            <a:r>
+              <a:rPr lang="en-US" sz="1600" b="1" dirty="0">
+                <a:solidFill>
+                  <a:srgbClr val="1A1A1A"/>
+                </a:solidFill>
+                <a:latin typeface="Arial" pitchFamily="34" charset="0"/>
+                <a:ea typeface="Arial" pitchFamily="34" charset="-122"/>
+                <a:cs typeface="Arial" pitchFamily="34" charset="-120"/>
+              </a:rPr>
+              <a:t>Le client possède la marque entièrement.</a:t>
+            </a:r>
+            <a:endParaRPr lang="en-US" sz="1600" dirty="0"/>
+          </a:p>
+        </p:txBody>
+      </p:sp>
+      <p:sp>
+        <p:nvSpPr>
+          <p:cNvPr id="10" name="Text 8"/>
+          <p:cNvSpPr/>
+          <p:nvPr/>
+        </p:nvSpPr>
+        <p:spPr>
+          <a:xfrm>
+            <a:off x="457200" y="4701540"/>
+            <a:ext cx="6949440" cy="605028"/>
+          </a:xfrm>
+          <a:prstGeom prst="rect">
+            <a:avLst/>
+          </a:prstGeom>
+          <a:noFill/>
+          <a:ln/>
+        </p:spPr>
+        <p:txBody>
+          <a:bodyPr wrap="square" rtlCol="0" anchor="t">
+            <a:normAutofit/>
+          </a:bodyPr>
+          <a:lstStyle/>
+          <a:p>
+            <a:pPr indent="0" marL="0">
+              <a:buNone/>
+            </a:pPr>
+            <a:r>
+              <a:rPr lang="en-US" sz="1300" dirty="0">
+                <a:solidFill>
+                  <a:srgbClr val="4A4A4A"/>
+                </a:solidFill>
+                <a:latin typeface="Arial" pitchFamily="34" charset="0"/>
+                <a:ea typeface="Arial" pitchFamily="34" charset="-122"/>
+                <a:cs typeface="Arial" pitchFamily="34" charset="-120"/>
+              </a:rPr>
+              <a:t>Déposable. Libre de droits. Une lettre formelle de transfert de droits est incluse à chaque projet. Les outils gratuits transfèrent rarement tous les droits.</a:t>
+            </a:r>
+            <a:endParaRPr lang="en-US" sz="1300" dirty="0"/>
+          </a:p>
+        </p:txBody>
+      </p:sp>
+      <p:sp>
+        <p:nvSpPr>
+          <p:cNvPr id="11" name="Text 9"/>
+          <p:cNvSpPr/>
+          <p:nvPr/>
+        </p:nvSpPr>
+        <p:spPr>
+          <a:xfrm>
+            <a:off x="457200" y="5443728"/>
+            <a:ext cx="6949440" cy="502920"/>
+          </a:xfrm>
+          <a:prstGeom prst="rect">
+            <a:avLst/>
+          </a:prstGeom>
+          <a:noFill/>
+          <a:ln/>
+        </p:spPr>
+        <p:txBody>
+          <a:bodyPr wrap="square" rtlCol="0" anchor="t">
+            <a:normAutofit/>
+          </a:bodyPr>
+          <a:lstStyle/>
+          <a:p>
+            <a:pPr indent="0" marL="0">
+              <a:buNone/>
+            </a:pPr>
+            <a:r>
+              <a:rPr lang="en-US" sz="1600" b="1" dirty="0">
+                <a:solidFill>
+                  <a:srgbClr val="1A1A1A"/>
+                </a:solidFill>
+                <a:latin typeface="Arial" pitchFamily="34" charset="0"/>
+                <a:ea typeface="Arial" pitchFamily="34" charset="-122"/>
+                <a:cs typeface="Arial" pitchFamily="34" charset="-120"/>
+              </a:rPr>
+              <a:t>Prêt pour chaque utilisation.</a:t>
+            </a:r>
+            <a:endParaRPr lang="en-US" sz="1600" dirty="0"/>
+          </a:p>
+        </p:txBody>
+      </p:sp>
+      <p:sp>
+        <p:nvSpPr>
+          <p:cNvPr id="12" name="Text 10"/>
+          <p:cNvSpPr/>
+          <p:nvPr/>
+        </p:nvSpPr>
+        <p:spPr>
+          <a:xfrm>
+            <a:off x="457200" y="6056376"/>
+            <a:ext cx="6949440" cy="502920"/>
+          </a:xfrm>
+          <a:prstGeom prst="rect">
+            <a:avLst/>
+          </a:prstGeom>
+          <a:noFill/>
+          <a:ln/>
+        </p:spPr>
+        <p:txBody>
+          <a:bodyPr wrap="square" rtlCol="0" anchor="t">
+            <a:normAutofit/>
+          </a:bodyPr>
+          <a:lstStyle/>
+          <a:p>
+            <a:pPr indent="0" marL="0">
+              <a:buNone/>
+            </a:pPr>
+            <a:r>
+              <a:rPr lang="en-US" sz="1300" dirty="0">
+                <a:solidFill>
+                  <a:srgbClr val="4A4A4A"/>
+                </a:solidFill>
+                <a:latin typeface="Arial" pitchFamily="34" charset="0"/>
+                <a:ea typeface="Arial" pitchFamily="34" charset="-122"/>
+                <a:cs typeface="Arial" pitchFamily="34" charset="-120"/>
+              </a:rPr>
+              <a:t>AI, EPS, PDF, JPG, PNG, GIF et ICO — six versions en couleur et cinq en noir et blanc. Web, impression, merchandising, réseaux sociaux, signalétique.</a:t>
+            </a:r>
+            <a:endParaRPr lang="en-US" sz="1300" dirty="0"/>
+          </a:p>
+        </p:txBody>
+      </p:sp>
       <p:pic>
         <p:nvPicPr>
-          <p:cNvPr id="4" name="Image 0" descr="preencoded.png">    </p:cNvPr>
+          <p:cNvPr id="13" name="Image 0" descr="preencoded.png">    </p:cNvPr>
           <p:cNvPicPr>
             <a:picLocks noChangeAspect="1"/>
           </p:cNvPicPr>
@@ -3058,8 +5442,8 @@
         </p:blipFill>
         <p:spPr>
           <a:xfrm>
-            <a:off x="7772400" y="1097280"/>
-            <a:ext cx="3657600" cy="2286000"/>
+            <a:off x="7680960" y="1005840"/>
+            <a:ext cx="3840480" cy="2560320"/>
           </a:xfrm>
           <a:prstGeom prst="rect">
             <a:avLst/>
@@ -3176,9 +5560,173 @@
           </a:p>
         </p:txBody>
       </p:sp>
+      <p:sp>
+        <p:nvSpPr>
+          <p:cNvPr id="4" name="Text 2"/>
+          <p:cNvSpPr/>
+          <p:nvPr/>
+        </p:nvSpPr>
+        <p:spPr>
+          <a:xfrm>
+            <a:off x="457200" y="868680"/>
+            <a:ext cx="6949440" cy="502920"/>
+          </a:xfrm>
+          <a:prstGeom prst="rect">
+            <a:avLst/>
+          </a:prstGeom>
+          <a:noFill/>
+          <a:ln/>
+        </p:spPr>
+        <p:txBody>
+          <a:bodyPr wrap="square" rtlCol="0" anchor="t">
+            <a:normAutofit/>
+          </a:bodyPr>
+          <a:lstStyle/>
+          <a:p>
+            <a:pPr indent="0" marL="0">
+              <a:buNone/>
+            </a:pPr>
+            <a:r>
+              <a:rPr lang="en-US" sz="2200" b="1" dirty="0">
+                <a:solidFill>
+                  <a:srgbClr val="1A1A1A"/>
+                </a:solidFill>
+                <a:latin typeface="Arial" pitchFamily="34" charset="0"/>
+                <a:ea typeface="Arial" pitchFamily="34" charset="-122"/>
+                <a:cs typeface="Arial" pitchFamily="34" charset="-120"/>
+              </a:rPr>
+              <a:t>Travaux sélectionnés</a:t>
+            </a:r>
+            <a:endParaRPr lang="en-US" sz="2200" dirty="0"/>
+          </a:p>
+        </p:txBody>
+      </p:sp>
+      <p:sp>
+        <p:nvSpPr>
+          <p:cNvPr id="5" name="Text 3"/>
+          <p:cNvSpPr/>
+          <p:nvPr/>
+        </p:nvSpPr>
+        <p:spPr>
+          <a:xfrm>
+            <a:off x="457200" y="1481328"/>
+            <a:ext cx="6949440" cy="668528"/>
+          </a:xfrm>
+          <a:prstGeom prst="rect">
+            <a:avLst/>
+          </a:prstGeom>
+          <a:noFill/>
+          <a:ln/>
+        </p:spPr>
+        <p:txBody>
+          <a:bodyPr wrap="square" rtlCol="0" anchor="t">
+            <a:normAutofit/>
+          </a:bodyPr>
+          <a:lstStyle/>
+          <a:p>
+            <a:pPr indent="0" marL="0">
+              <a:buNone/>
+            </a:pPr>
+            <a:r>
+              <a:rPr lang="en-US" sz="2200" b="1" dirty="0">
+                <a:solidFill>
+                  <a:srgbClr val="1A1A1A"/>
+                </a:solidFill>
+                <a:latin typeface="Arial" pitchFamily="34" charset="0"/>
+                <a:ea typeface="Arial" pitchFamily="34" charset="-122"/>
+                <a:cs typeface="Arial" pitchFamily="34" charset="-120"/>
+              </a:rPr>
+              <a:t>Quelques-unes des marques que nous avons construites.</a:t>
+            </a:r>
+            <a:endParaRPr lang="en-US" sz="2200" dirty="0"/>
+          </a:p>
+        </p:txBody>
+      </p:sp>
+      <p:sp>
+        <p:nvSpPr>
+          <p:cNvPr id="6" name="Text 4"/>
+          <p:cNvSpPr/>
+          <p:nvPr/>
+        </p:nvSpPr>
+        <p:spPr>
+          <a:xfrm>
+            <a:off x="457200" y="2259584"/>
+            <a:ext cx="6949440" cy="502920"/>
+          </a:xfrm>
+          <a:prstGeom prst="rect">
+            <a:avLst/>
+          </a:prstGeom>
+          <a:noFill/>
+          <a:ln/>
+        </p:spPr>
+        <p:txBody>
+          <a:bodyPr wrap="square" rtlCol="0" anchor="t">
+            <a:normAutofit/>
+          </a:bodyPr>
+          <a:lstStyle/>
+          <a:p>
+            <a:pPr indent="0" marL="0">
+              <a:buNone/>
+            </a:pPr>
+            <a:r>
+              <a:rPr lang="en-US" sz="1600" b="1" dirty="0">
+                <a:solidFill>
+                  <a:srgbClr val="1A1A1A"/>
+                </a:solidFill>
+                <a:latin typeface="Arial" pitchFamily="34" charset="0"/>
+                <a:ea typeface="Arial" pitchFamily="34" charset="-122"/>
+                <a:cs typeface="Arial" pitchFamily="34" charset="-120"/>
+              </a:rPr>
+              <a:t>Logos livrés</a:t>
+            </a:r>
+            <a:endParaRPr lang="en-US" sz="1600" dirty="0"/>
+          </a:p>
+        </p:txBody>
+      </p:sp>
+      <p:sp>
+        <p:nvSpPr>
+          <p:cNvPr id="7" name="Text 5"/>
+          <p:cNvSpPr/>
+          <p:nvPr/>
+        </p:nvSpPr>
+        <p:spPr>
+          <a:xfrm>
+            <a:off x="457200" y="2872232"/>
+            <a:ext cx="6949440" cy="502920"/>
+          </a:xfrm>
+          <a:prstGeom prst="rect">
+            <a:avLst/>
+          </a:prstGeom>
+          <a:noFill/>
+          <a:ln/>
+        </p:spPr>
+        <p:txBody>
+          <a:bodyPr wrap="square" rtlCol="0" anchor="t">
+            <a:normAutofit/>
+          </a:bodyPr>
+          <a:lstStyle/>
+          <a:p>
+            <a:pPr indent="0" marL="0">
+              <a:buNone/>
+            </a:pPr>
+            <a:r>
+              <a:rPr lang="en-US" sz="1600" b="1" dirty="0">
+                <a:solidFill>
+                  <a:srgbClr val="1A1A1A"/>
+                </a:solidFill>
+                <a:latin typeface="Arial" pitchFamily="34" charset="0"/>
+                <a:ea typeface="Arial" pitchFamily="34" charset="-122"/>
+                <a:cs typeface="Arial" pitchFamily="34" charset="-120"/>
+              </a:rPr>
+              <a:t>Verticales</a:t>
+            </a:r>
+            <a:endParaRPr lang="en-US" sz="1600" dirty="0"/>
+          </a:p>
+        </p:txBody>
+      </p:sp>
       <p:pic>
         <p:nvPicPr>
-          <p:cNvPr id="4" name="Image 0" descr="preencoded.png">    </p:cNvPr>
+          <p:cNvPr id="8" name="Image 0" descr="preencoded.png">    </p:cNvPr>
           <p:cNvPicPr>
             <a:picLocks noChangeAspect="1"/>
           </p:cNvPicPr>
@@ -3192,8 +5740,200 @@
         </p:blipFill>
         <p:spPr>
           <a:xfrm>
-            <a:off x="7772400" y="1097280"/>
-            <a:ext cx="3657600" cy="2286000"/>
+            <a:off x="7498080" y="914400"/>
+            <a:ext cx="3474720" cy="1463040"/>
+          </a:xfrm>
+          <a:prstGeom prst="rect">
+            <a:avLst/>
+          </a:prstGeom>
+        </p:spPr>
+      </p:pic>
+      <p:pic>
+        <p:nvPicPr>
+          <p:cNvPr id="9" name="Image 1" descr="preencoded.png">    </p:cNvPr>
+          <p:cNvPicPr>
+            <a:picLocks noChangeAspect="1"/>
+          </p:cNvPicPr>
+          <p:nvPr/>
+        </p:nvPicPr>
+        <p:blipFill>
+          <a:blip r:embed="rId2"/>
+          <a:stretch>
+            <a:fillRect/>
+          </a:stretch>
+        </p:blipFill>
+        <p:spPr>
+          <a:xfrm>
+            <a:off x="11109960" y="914400"/>
+            <a:ext cx="3474720" cy="1463040"/>
+          </a:xfrm>
+          <a:prstGeom prst="rect">
+            <a:avLst/>
+          </a:prstGeom>
+        </p:spPr>
+      </p:pic>
+      <p:pic>
+        <p:nvPicPr>
+          <p:cNvPr id="10" name="Image 2" descr="preencoded.png">    </p:cNvPr>
+          <p:cNvPicPr>
+            <a:picLocks noChangeAspect="1"/>
+          </p:cNvPicPr>
+          <p:nvPr/>
+        </p:nvPicPr>
+        <p:blipFill>
+          <a:blip r:embed="rId3"/>
+          <a:stretch>
+            <a:fillRect/>
+          </a:stretch>
+        </p:blipFill>
+        <p:spPr>
+          <a:xfrm>
+            <a:off x="14721840" y="914400"/>
+            <a:ext cx="3474720" cy="1463040"/>
+          </a:xfrm>
+          <a:prstGeom prst="rect">
+            <a:avLst/>
+          </a:prstGeom>
+        </p:spPr>
+      </p:pic>
+      <p:pic>
+        <p:nvPicPr>
+          <p:cNvPr id="11" name="Image 3" descr="preencoded.png">    </p:cNvPr>
+          <p:cNvPicPr>
+            <a:picLocks noChangeAspect="1"/>
+          </p:cNvPicPr>
+          <p:nvPr/>
+        </p:nvPicPr>
+        <p:blipFill>
+          <a:blip r:embed="rId4"/>
+          <a:stretch>
+            <a:fillRect/>
+          </a:stretch>
+        </p:blipFill>
+        <p:spPr>
+          <a:xfrm>
+            <a:off x="7498080" y="2514600"/>
+            <a:ext cx="3474720" cy="1463040"/>
+          </a:xfrm>
+          <a:prstGeom prst="rect">
+            <a:avLst/>
+          </a:prstGeom>
+        </p:spPr>
+      </p:pic>
+      <p:pic>
+        <p:nvPicPr>
+          <p:cNvPr id="12" name="Image 4" descr="preencoded.png">    </p:cNvPr>
+          <p:cNvPicPr>
+            <a:picLocks noChangeAspect="1"/>
+          </p:cNvPicPr>
+          <p:nvPr/>
+        </p:nvPicPr>
+        <p:blipFill>
+          <a:blip r:embed="rId5"/>
+          <a:stretch>
+            <a:fillRect/>
+          </a:stretch>
+        </p:blipFill>
+        <p:spPr>
+          <a:xfrm>
+            <a:off x="11109960" y="2514600"/>
+            <a:ext cx="3474720" cy="1463040"/>
+          </a:xfrm>
+          <a:prstGeom prst="rect">
+            <a:avLst/>
+          </a:prstGeom>
+        </p:spPr>
+      </p:pic>
+      <p:pic>
+        <p:nvPicPr>
+          <p:cNvPr id="13" name="Image 5" descr="preencoded.png">    </p:cNvPr>
+          <p:cNvPicPr>
+            <a:picLocks noChangeAspect="1"/>
+          </p:cNvPicPr>
+          <p:nvPr/>
+        </p:nvPicPr>
+        <p:blipFill>
+          <a:blip r:embed="rId6"/>
+          <a:stretch>
+            <a:fillRect/>
+          </a:stretch>
+        </p:blipFill>
+        <p:spPr>
+          <a:xfrm>
+            <a:off x="14721840" y="2514600"/>
+            <a:ext cx="3474720" cy="1463040"/>
+          </a:xfrm>
+          <a:prstGeom prst="rect">
+            <a:avLst/>
+          </a:prstGeom>
+        </p:spPr>
+      </p:pic>
+      <p:pic>
+        <p:nvPicPr>
+          <p:cNvPr id="14" name="Image 6" descr="preencoded.png">    </p:cNvPr>
+          <p:cNvPicPr>
+            <a:picLocks noChangeAspect="1"/>
+          </p:cNvPicPr>
+          <p:nvPr/>
+        </p:nvPicPr>
+        <p:blipFill>
+          <a:blip r:embed="rId7"/>
+          <a:stretch>
+            <a:fillRect/>
+          </a:stretch>
+        </p:blipFill>
+        <p:spPr>
+          <a:xfrm>
+            <a:off x="7498080" y="4114800"/>
+            <a:ext cx="3474720" cy="1463040"/>
+          </a:xfrm>
+          <a:prstGeom prst="rect">
+            <a:avLst/>
+          </a:prstGeom>
+        </p:spPr>
+      </p:pic>
+      <p:pic>
+        <p:nvPicPr>
+          <p:cNvPr id="15" name="Image 7" descr="preencoded.png">    </p:cNvPr>
+          <p:cNvPicPr>
+            <a:picLocks noChangeAspect="1"/>
+          </p:cNvPicPr>
+          <p:nvPr/>
+        </p:nvPicPr>
+        <p:blipFill>
+          <a:blip r:embed="rId8"/>
+          <a:stretch>
+            <a:fillRect/>
+          </a:stretch>
+        </p:blipFill>
+        <p:spPr>
+          <a:xfrm>
+            <a:off x="11109960" y="4114800"/>
+            <a:ext cx="3474720" cy="1463040"/>
+          </a:xfrm>
+          <a:prstGeom prst="rect">
+            <a:avLst/>
+          </a:prstGeom>
+        </p:spPr>
+      </p:pic>
+      <p:pic>
+        <p:nvPicPr>
+          <p:cNvPr id="16" name="Image 8" descr="preencoded.png">    </p:cNvPr>
+          <p:cNvPicPr>
+            <a:picLocks noChangeAspect="1"/>
+          </p:cNvPicPr>
+          <p:nvPr/>
+        </p:nvPicPr>
+        <p:blipFill>
+          <a:blip r:embed="rId9"/>
+          <a:stretch>
+            <a:fillRect/>
+          </a:stretch>
+        </p:blipFill>
+        <p:spPr>
+          <a:xfrm>
+            <a:off x="14721840" y="4114800"/>
+            <a:ext cx="3474720" cy="1463040"/>
           </a:xfrm>
           <a:prstGeom prst="rect">
             <a:avLst/>
@@ -3310,9 +6050,378 @@
           </a:p>
         </p:txBody>
       </p:sp>
+      <p:sp>
+        <p:nvSpPr>
+          <p:cNvPr id="4" name="Text 2"/>
+          <p:cNvSpPr/>
+          <p:nvPr/>
+        </p:nvSpPr>
+        <p:spPr>
+          <a:xfrm>
+            <a:off x="457200" y="868680"/>
+            <a:ext cx="6949440" cy="502920"/>
+          </a:xfrm>
+          <a:prstGeom prst="rect">
+            <a:avLst/>
+          </a:prstGeom>
+          <a:noFill/>
+          <a:ln/>
+        </p:spPr>
+        <p:txBody>
+          <a:bodyPr wrap="square" rtlCol="0" anchor="t">
+            <a:normAutofit/>
+          </a:bodyPr>
+          <a:lstStyle/>
+          <a:p>
+            <a:pPr indent="0" marL="0">
+              <a:buNone/>
+            </a:pPr>
+            <a:r>
+              <a:rPr lang="en-US" sz="2200" b="1" dirty="0">
+                <a:solidFill>
+                  <a:srgbClr val="1A1A1A"/>
+                </a:solidFill>
+                <a:latin typeface="Arial" pitchFamily="34" charset="0"/>
+                <a:ea typeface="Arial" pitchFamily="34" charset="-122"/>
+                <a:cs typeface="Arial" pitchFamily="34" charset="-120"/>
+              </a:rPr>
+              <a:t>Le processus créatif</a:t>
+            </a:r>
+            <a:endParaRPr lang="en-US" sz="2200" dirty="0"/>
+          </a:p>
+        </p:txBody>
+      </p:sp>
+      <p:sp>
+        <p:nvSpPr>
+          <p:cNvPr id="5" name="Text 3"/>
+          <p:cNvSpPr/>
+          <p:nvPr/>
+        </p:nvSpPr>
+        <p:spPr>
+          <a:xfrm>
+            <a:off x="457200" y="1481328"/>
+            <a:ext cx="6949440" cy="502920"/>
+          </a:xfrm>
+          <a:prstGeom prst="rect">
+            <a:avLst/>
+          </a:prstGeom>
+          <a:noFill/>
+          <a:ln/>
+        </p:spPr>
+        <p:txBody>
+          <a:bodyPr wrap="square" rtlCol="0" anchor="t">
+            <a:normAutofit/>
+          </a:bodyPr>
+          <a:lstStyle/>
+          <a:p>
+            <a:pPr indent="0" marL="0">
+              <a:buNone/>
+            </a:pPr>
+            <a:r>
+              <a:rPr lang="en-US" sz="2200" b="1" dirty="0">
+                <a:solidFill>
+                  <a:srgbClr val="1A1A1A"/>
+                </a:solidFill>
+                <a:latin typeface="Arial" pitchFamily="34" charset="0"/>
+                <a:ea typeface="Arial" pitchFamily="34" charset="-122"/>
+                <a:cs typeface="Arial" pitchFamily="34" charset="-120"/>
+              </a:rPr>
+              <a:t>Du brief aux fichiers finaux.</a:t>
+            </a:r>
+            <a:endParaRPr lang="en-US" sz="2200" dirty="0"/>
+          </a:p>
+        </p:txBody>
+      </p:sp>
+      <p:sp>
+        <p:nvSpPr>
+          <p:cNvPr id="6" name="Text 4"/>
+          <p:cNvSpPr/>
+          <p:nvPr/>
+        </p:nvSpPr>
+        <p:spPr>
+          <a:xfrm>
+            <a:off x="457200" y="2093976"/>
+            <a:ext cx="6949440" cy="502920"/>
+          </a:xfrm>
+          <a:prstGeom prst="rect">
+            <a:avLst/>
+          </a:prstGeom>
+          <a:noFill/>
+          <a:ln/>
+        </p:spPr>
+        <p:txBody>
+          <a:bodyPr wrap="square" rtlCol="0" anchor="t">
+            <a:normAutofit/>
+          </a:bodyPr>
+          <a:lstStyle/>
+          <a:p>
+            <a:pPr indent="0" marL="0">
+              <a:buNone/>
+            </a:pPr>
+            <a:r>
+              <a:rPr lang="en-US" sz="1600" b="1" dirty="0">
+                <a:solidFill>
+                  <a:srgbClr val="1A1A1A"/>
+                </a:solidFill>
+                <a:latin typeface="Arial" pitchFamily="34" charset="0"/>
+                <a:ea typeface="Arial" pitchFamily="34" charset="-122"/>
+                <a:cs typeface="Arial" pitchFamily="34" charset="-120"/>
+              </a:rPr>
+              <a:t>Achat &amp; bienvenue</a:t>
+            </a:r>
+            <a:endParaRPr lang="en-US" sz="1600" dirty="0"/>
+          </a:p>
+        </p:txBody>
+      </p:sp>
+      <p:sp>
+        <p:nvSpPr>
+          <p:cNvPr id="7" name="Text 5"/>
+          <p:cNvSpPr/>
+          <p:nvPr/>
+        </p:nvSpPr>
+        <p:spPr>
+          <a:xfrm>
+            <a:off x="457200" y="2706624"/>
+            <a:ext cx="6949440" cy="502920"/>
+          </a:xfrm>
+          <a:prstGeom prst="rect">
+            <a:avLst/>
+          </a:prstGeom>
+          <a:noFill/>
+          <a:ln/>
+        </p:spPr>
+        <p:txBody>
+          <a:bodyPr wrap="square" rtlCol="0" anchor="t">
+            <a:normAutofit/>
+          </a:bodyPr>
+          <a:lstStyle/>
+          <a:p>
+            <a:pPr indent="0" marL="0">
+              <a:buNone/>
+            </a:pPr>
+            <a:r>
+              <a:rPr lang="en-US" sz="1300" dirty="0">
+                <a:solidFill>
+                  <a:srgbClr val="4A4A4A"/>
+                </a:solidFill>
+                <a:latin typeface="Arial" pitchFamily="34" charset="0"/>
+                <a:ea typeface="Arial" pitchFamily="34" charset="-122"/>
+                <a:cs typeface="Arial" pitchFamily="34" charset="-120"/>
+              </a:rPr>
+              <a:t>Le client achète un forfait et reçoit un e-mail de bienvenue confirmant la commande.</a:t>
+            </a:r>
+            <a:endParaRPr lang="en-US" sz="1300" dirty="0"/>
+          </a:p>
+        </p:txBody>
+      </p:sp>
+      <p:sp>
+        <p:nvSpPr>
+          <p:cNvPr id="8" name="Text 6"/>
+          <p:cNvSpPr/>
+          <p:nvPr/>
+        </p:nvSpPr>
+        <p:spPr>
+          <a:xfrm>
+            <a:off x="457200" y="3346704"/>
+            <a:ext cx="6949440" cy="502920"/>
+          </a:xfrm>
+          <a:prstGeom prst="rect">
+            <a:avLst/>
+          </a:prstGeom>
+          <a:noFill/>
+          <a:ln/>
+        </p:spPr>
+        <p:txBody>
+          <a:bodyPr wrap="square" rtlCol="0" anchor="t">
+            <a:normAutofit/>
+          </a:bodyPr>
+          <a:lstStyle/>
+          <a:p>
+            <a:pPr indent="0" marL="0">
+              <a:buNone/>
+            </a:pPr>
+            <a:r>
+              <a:rPr lang="en-US" sz="1600" b="1" dirty="0">
+                <a:solidFill>
+                  <a:srgbClr val="1A1A1A"/>
+                </a:solidFill>
+                <a:latin typeface="Arial" pitchFamily="34" charset="0"/>
+                <a:ea typeface="Arial" pitchFamily="34" charset="-122"/>
+                <a:cs typeface="Arial" pitchFamily="34" charset="-120"/>
+              </a:rPr>
+              <a:t>Contact du coordinateur</a:t>
+            </a:r>
+            <a:endParaRPr lang="en-US" sz="1600" dirty="0"/>
+          </a:p>
+        </p:txBody>
+      </p:sp>
+      <p:sp>
+        <p:nvSpPr>
+          <p:cNvPr id="9" name="Text 7"/>
+          <p:cNvSpPr/>
+          <p:nvPr/>
+        </p:nvSpPr>
+        <p:spPr>
+          <a:xfrm>
+            <a:off x="457200" y="3959352"/>
+            <a:ext cx="6949440" cy="502920"/>
+          </a:xfrm>
+          <a:prstGeom prst="rect">
+            <a:avLst/>
+          </a:prstGeom>
+          <a:noFill/>
+          <a:ln/>
+        </p:spPr>
+        <p:txBody>
+          <a:bodyPr wrap="square" rtlCol="0" anchor="t">
+            <a:normAutofit/>
+          </a:bodyPr>
+          <a:lstStyle/>
+          <a:p>
+            <a:pPr indent="0" marL="0">
+              <a:buNone/>
+            </a:pPr>
+            <a:r>
+              <a:rPr lang="en-US" sz="1300" dirty="0">
+                <a:solidFill>
+                  <a:srgbClr val="4A4A4A"/>
+                </a:solidFill>
+                <a:latin typeface="Arial" pitchFamily="34" charset="0"/>
+                <a:ea typeface="Arial" pitchFamily="34" charset="-122"/>
+                <a:cs typeface="Arial" pitchFamily="34" charset="-120"/>
+              </a:rPr>
+              <a:t>Un Coordinateur de Conception de Logo dédié recueille le brief créatif — objectifs, style, couleurs, références.</a:t>
+            </a:r>
+            <a:endParaRPr lang="en-US" sz="1300" dirty="0"/>
+          </a:p>
+        </p:txBody>
+      </p:sp>
+      <p:sp>
+        <p:nvSpPr>
+          <p:cNvPr id="10" name="Text 8"/>
+          <p:cNvSpPr/>
+          <p:nvPr/>
+        </p:nvSpPr>
+        <p:spPr>
+          <a:xfrm>
+            <a:off x="457200" y="4599432"/>
+            <a:ext cx="6949440" cy="502920"/>
+          </a:xfrm>
+          <a:prstGeom prst="rect">
+            <a:avLst/>
+          </a:prstGeom>
+          <a:noFill/>
+          <a:ln/>
+        </p:spPr>
+        <p:txBody>
+          <a:bodyPr wrap="square" rtlCol="0" anchor="t">
+            <a:normAutofit/>
+          </a:bodyPr>
+          <a:lstStyle/>
+          <a:p>
+            <a:pPr indent="0" marL="0">
+              <a:buNone/>
+            </a:pPr>
+            <a:r>
+              <a:rPr lang="en-US" sz="1600" b="1" dirty="0">
+                <a:solidFill>
+                  <a:srgbClr val="1A1A1A"/>
+                </a:solidFill>
+                <a:latin typeface="Arial" pitchFamily="34" charset="0"/>
+                <a:ea typeface="Arial" pitchFamily="34" charset="-122"/>
+                <a:cs typeface="Arial" pitchFamily="34" charset="-120"/>
+              </a:rPr>
+              <a:t>Concepts initiaux</a:t>
+            </a:r>
+            <a:endParaRPr lang="en-US" sz="1600" dirty="0"/>
+          </a:p>
+        </p:txBody>
+      </p:sp>
+      <p:sp>
+        <p:nvSpPr>
+          <p:cNvPr id="11" name="Text 9"/>
+          <p:cNvSpPr/>
+          <p:nvPr/>
+        </p:nvSpPr>
+        <p:spPr>
+          <a:xfrm>
+            <a:off x="457200" y="5212080"/>
+            <a:ext cx="6949440" cy="502920"/>
+          </a:xfrm>
+          <a:prstGeom prst="rect">
+            <a:avLst/>
+          </a:prstGeom>
+          <a:noFill/>
+          <a:ln/>
+        </p:spPr>
+        <p:txBody>
+          <a:bodyPr wrap="square" rtlCol="0" anchor="t">
+            <a:normAutofit/>
+          </a:bodyPr>
+          <a:lstStyle/>
+          <a:p>
+            <a:pPr indent="0" marL="0">
+              <a:buNone/>
+            </a:pPr>
+            <a:r>
+              <a:rPr lang="en-US" sz="1300" dirty="0">
+                <a:solidFill>
+                  <a:srgbClr val="4A4A4A"/>
+                </a:solidFill>
+                <a:latin typeface="Arial" pitchFamily="34" charset="0"/>
+                <a:ea typeface="Arial" pitchFamily="34" charset="-122"/>
+                <a:cs typeface="Arial" pitchFamily="34" charset="-120"/>
+              </a:rPr>
+              <a:t>Les designers internes livrent jusqu'à dix concepts personnalisés sur la base du brief.</a:t>
+            </a:r>
+            <a:endParaRPr lang="en-US" sz="1300" dirty="0"/>
+          </a:p>
+        </p:txBody>
+      </p:sp>
+      <p:sp>
+        <p:nvSpPr>
+          <p:cNvPr id="12" name="Text 10"/>
+          <p:cNvSpPr/>
+          <p:nvPr/>
+        </p:nvSpPr>
+        <p:spPr>
+          <a:xfrm>
+            <a:off x="457200" y="5852160"/>
+            <a:ext cx="6949440" cy="502920"/>
+          </a:xfrm>
+          <a:prstGeom prst="rect">
+            <a:avLst/>
+          </a:prstGeom>
+          <a:noFill/>
+          <a:ln/>
+        </p:spPr>
+        <p:txBody>
+          <a:bodyPr wrap="square" rtlCol="0" anchor="t">
+            <a:normAutofit/>
+          </a:bodyPr>
+          <a:lstStyle/>
+          <a:p>
+            <a:pPr indent="0" marL="0">
+              <a:buNone/>
+            </a:pPr>
+            <a:r>
+              <a:rPr lang="en-US" sz="1600" b="1" dirty="0">
+                <a:solidFill>
+                  <a:srgbClr val="1A1A1A"/>
+                </a:solidFill>
+                <a:latin typeface="Arial" pitchFamily="34" charset="0"/>
+                <a:ea typeface="Arial" pitchFamily="34" charset="-122"/>
+                <a:cs typeface="Arial" pitchFamily="34" charset="-120"/>
+              </a:rPr>
+              <a:t>Révisions</a:t>
+            </a:r>
+            <a:endParaRPr lang="en-US" sz="1600" dirty="0"/>
+          </a:p>
+        </p:txBody>
+      </p:sp>
       <p:pic>
         <p:nvPicPr>
-          <p:cNvPr id="4" name="Image 0" descr="preencoded.png">    </p:cNvPr>
+          <p:cNvPr id="13" name="Image 0" descr="preencoded.png">    </p:cNvPr>
           <p:cNvPicPr>
             <a:picLocks noChangeAspect="1"/>
           </p:cNvPicPr>
@@ -3326,8 +6435,8 @@
         </p:blipFill>
         <p:spPr>
           <a:xfrm>
-            <a:off x="7772400" y="1097280"/>
-            <a:ext cx="3657600" cy="2286000"/>
+            <a:off x="7680960" y="1005840"/>
+            <a:ext cx="3840480" cy="2560320"/>
           </a:xfrm>
           <a:prstGeom prst="rect">
             <a:avLst/>
@@ -3444,6 +6553,357 @@
           </a:p>
         </p:txBody>
       </p:sp>
+      <p:sp>
+        <p:nvSpPr>
+          <p:cNvPr id="4" name="Text 2"/>
+          <p:cNvSpPr/>
+          <p:nvPr/>
+        </p:nvSpPr>
+        <p:spPr>
+          <a:xfrm>
+            <a:off x="457200" y="868680"/>
+            <a:ext cx="10972800" cy="502920"/>
+          </a:xfrm>
+          <a:prstGeom prst="rect">
+            <a:avLst/>
+          </a:prstGeom>
+          <a:noFill/>
+          <a:ln/>
+        </p:spPr>
+        <p:txBody>
+          <a:bodyPr wrap="square" rtlCol="0" anchor="t">
+            <a:normAutofit/>
+          </a:bodyPr>
+          <a:lstStyle/>
+          <a:p>
+            <a:pPr indent="0" marL="0">
+              <a:buNone/>
+            </a:pPr>
+            <a:r>
+              <a:rPr lang="en-US" sz="2200" b="1" dirty="0">
+                <a:solidFill>
+                  <a:srgbClr val="1A1A1A"/>
+                </a:solidFill>
+                <a:latin typeface="Arial" pitchFamily="34" charset="0"/>
+                <a:ea typeface="Arial" pitchFamily="34" charset="-122"/>
+                <a:cs typeface="Arial" pitchFamily="34" charset="-120"/>
+              </a:rPr>
+              <a:t>Forfaits &amp; tarifs</a:t>
+            </a:r>
+            <a:endParaRPr lang="en-US" sz="2200" dirty="0"/>
+          </a:p>
+        </p:txBody>
+      </p:sp>
+      <p:sp>
+        <p:nvSpPr>
+          <p:cNvPr id="5" name="Text 3"/>
+          <p:cNvSpPr/>
+          <p:nvPr/>
+        </p:nvSpPr>
+        <p:spPr>
+          <a:xfrm>
+            <a:off x="457200" y="1481328"/>
+            <a:ext cx="10972800" cy="502920"/>
+          </a:xfrm>
+          <a:prstGeom prst="rect">
+            <a:avLst/>
+          </a:prstGeom>
+          <a:noFill/>
+          <a:ln/>
+        </p:spPr>
+        <p:txBody>
+          <a:bodyPr wrap="square" rtlCol="0" anchor="t">
+            <a:normAutofit/>
+          </a:bodyPr>
+          <a:lstStyle/>
+          <a:p>
+            <a:pPr indent="0" marL="0">
+              <a:buNone/>
+            </a:pPr>
+            <a:r>
+              <a:rPr lang="en-US" sz="2200" b="1" dirty="0">
+                <a:solidFill>
+                  <a:srgbClr val="1A1A1A"/>
+                </a:solidFill>
+                <a:latin typeface="Arial" pitchFamily="34" charset="0"/>
+                <a:ea typeface="Arial" pitchFamily="34" charset="-122"/>
+                <a:cs typeface="Arial" pitchFamily="34" charset="-120"/>
+              </a:rPr>
+              <a:t>Trois niveaux pour chaque budget.</a:t>
+            </a:r>
+            <a:endParaRPr lang="en-US" sz="2200" dirty="0"/>
+          </a:p>
+        </p:txBody>
+      </p:sp>
+      <p:sp>
+        <p:nvSpPr>
+          <p:cNvPr id="6" name="Text 4"/>
+          <p:cNvSpPr/>
+          <p:nvPr/>
+        </p:nvSpPr>
+        <p:spPr>
+          <a:xfrm>
+            <a:off x="457200" y="2093976"/>
+            <a:ext cx="10972800" cy="502920"/>
+          </a:xfrm>
+          <a:prstGeom prst="rect">
+            <a:avLst/>
+          </a:prstGeom>
+          <a:noFill/>
+          <a:ln/>
+        </p:spPr>
+        <p:txBody>
+          <a:bodyPr wrap="square" rtlCol="0" anchor="t">
+            <a:normAutofit/>
+          </a:bodyPr>
+          <a:lstStyle/>
+          <a:p>
+            <a:pPr indent="0" marL="0">
+              <a:buNone/>
+            </a:pPr>
+            <a:r>
+              <a:rPr lang="en-US" sz="1300" dirty="0">
+                <a:solidFill>
+                  <a:srgbClr val="4A4A4A"/>
+                </a:solidFill>
+                <a:latin typeface="Arial" pitchFamily="34" charset="0"/>
+                <a:ea typeface="Arial" pitchFamily="34" charset="-122"/>
+                <a:cs typeface="Arial" pitchFamily="34" charset="-120"/>
+              </a:rPr>
+              <a:t>Tous les forfaits incluent le Coordinateur de Conception de Logo, trois cycles de révisions, le pack de 11 formats et la propriété totale du design final.</a:t>
+            </a:r>
+            <a:endParaRPr lang="en-US" sz="1300" dirty="0"/>
+          </a:p>
+        </p:txBody>
+      </p:sp>
+      <p:sp>
+        <p:nvSpPr>
+          <p:cNvPr id="7" name="Text 5"/>
+          <p:cNvSpPr/>
+          <p:nvPr/>
+        </p:nvSpPr>
+        <p:spPr>
+          <a:xfrm>
+            <a:off x="594360" y="2734056"/>
+            <a:ext cx="10789920" cy="1783080"/>
+          </a:xfrm>
+          <a:prstGeom prst="rect">
+            <a:avLst/>
+          </a:prstGeom>
+          <a:noFill/>
+          <a:ln/>
+        </p:spPr>
+        <p:txBody>
+          <a:bodyPr wrap="square" rtlCol="0" anchor="t">
+            <a:normAutofit/>
+          </a:bodyPr>
+          <a:lstStyle/>
+          <a:p>
+            <a:pPr marL="342900" indent="-342900">
+              <a:buSzPct val="100000"/>
+              <a:buChar char="•"/>
+            </a:pPr>
+            <a:r>
+              <a:rPr lang="en-US" sz="1200" dirty="0">
+                <a:solidFill>
+                  <a:srgbClr val="4A4A4A"/>
+                </a:solidFill>
+                <a:latin typeface="Arial" pitchFamily="34" charset="0"/>
+                <a:ea typeface="Arial" pitchFamily="34" charset="-122"/>
+                <a:cs typeface="Arial" pitchFamily="34" charset="-120"/>
+              </a:rPr>
+              <a:t>Coordinateur de Conception de Logo</a:t>
+            </a:r>
+            <a:endParaRPr lang="en-US" sz="1200" dirty="0"/>
+          </a:p>
+          <a:p>
+            <a:pPr marL="342900" indent="-342900">
+              <a:buSzPct val="100000"/>
+              <a:buChar char="•"/>
+            </a:pPr>
+            <a:r>
+              <a:rPr lang="en-US" sz="1200" dirty="0">
+                <a:solidFill>
+                  <a:srgbClr val="4A4A4A"/>
+                </a:solidFill>
+                <a:latin typeface="Arial" pitchFamily="34" charset="0"/>
+                <a:ea typeface="Arial" pitchFamily="34" charset="-122"/>
+                <a:cs typeface="Arial" pitchFamily="34" charset="-120"/>
+              </a:rPr>
+              <a:t>4 concepts de design personnalisés</a:t>
+            </a:r>
+            <a:endParaRPr lang="en-US" sz="1200" dirty="0"/>
+          </a:p>
+          <a:p>
+            <a:pPr marL="342900" indent="-342900">
+              <a:buSzPct val="100000"/>
+              <a:buChar char="•"/>
+            </a:pPr>
+            <a:r>
+              <a:rPr lang="en-US" sz="1200" dirty="0">
+                <a:solidFill>
+                  <a:srgbClr val="4A4A4A"/>
+                </a:solidFill>
+                <a:latin typeface="Arial" pitchFamily="34" charset="0"/>
+                <a:ea typeface="Arial" pitchFamily="34" charset="-122"/>
+                <a:cs typeface="Arial" pitchFamily="34" charset="-120"/>
+              </a:rPr>
+              <a:t>3 cycles de révisions</a:t>
+            </a:r>
+            <a:endParaRPr lang="en-US" sz="1200" dirty="0"/>
+          </a:p>
+          <a:p>
+            <a:pPr marL="342900" indent="-342900">
+              <a:buSzPct val="100000"/>
+              <a:buChar char="•"/>
+            </a:pPr>
+            <a:r>
+              <a:rPr lang="en-US" sz="1200" dirty="0">
+                <a:solidFill>
+                  <a:srgbClr val="4A4A4A"/>
+                </a:solidFill>
+                <a:latin typeface="Arial" pitchFamily="34" charset="0"/>
+                <a:ea typeface="Arial" pitchFamily="34" charset="-122"/>
+                <a:cs typeface="Arial" pitchFamily="34" charset="-120"/>
+              </a:rPr>
+              <a:t>11 formats de fichier finaux</a:t>
+            </a:r>
+            <a:endParaRPr lang="en-US" sz="1200" dirty="0"/>
+          </a:p>
+          <a:p>
+            <a:pPr marL="342900" indent="-342900">
+              <a:buSzPct val="100000"/>
+              <a:buChar char="•"/>
+            </a:pPr>
+            <a:r>
+              <a:rPr lang="en-US" sz="1200" dirty="0">
+                <a:solidFill>
+                  <a:srgbClr val="4A4A4A"/>
+                </a:solidFill>
+                <a:latin typeface="Arial" pitchFamily="34" charset="0"/>
+                <a:ea typeface="Arial" pitchFamily="34" charset="-122"/>
+                <a:cs typeface="Arial" pitchFamily="34" charset="-120"/>
+              </a:rPr>
+              <a:t>Propriété totale du design</a:t>
+            </a:r>
+            <a:endParaRPr lang="en-US" sz="1200" dirty="0"/>
+          </a:p>
+        </p:txBody>
+      </p:sp>
+      <p:sp>
+        <p:nvSpPr>
+          <p:cNvPr id="8" name="Text 6"/>
+          <p:cNvSpPr/>
+          <p:nvPr/>
+        </p:nvSpPr>
+        <p:spPr>
+          <a:xfrm>
+            <a:off x="594360" y="4654296"/>
+            <a:ext cx="10789920" cy="1783080"/>
+          </a:xfrm>
+          <a:prstGeom prst="rect">
+            <a:avLst/>
+          </a:prstGeom>
+          <a:noFill/>
+          <a:ln/>
+        </p:spPr>
+        <p:txBody>
+          <a:bodyPr wrap="square" rtlCol="0" anchor="t">
+            <a:normAutofit/>
+          </a:bodyPr>
+          <a:lstStyle/>
+          <a:p>
+            <a:pPr marL="342900" indent="-342900">
+              <a:buSzPct val="100000"/>
+              <a:buChar char="•"/>
+            </a:pPr>
+            <a:r>
+              <a:rPr lang="en-US" sz="1200" dirty="0">
+                <a:solidFill>
+                  <a:srgbClr val="4A4A4A"/>
+                </a:solidFill>
+                <a:latin typeface="Arial" pitchFamily="34" charset="0"/>
+                <a:ea typeface="Arial" pitchFamily="34" charset="-122"/>
+                <a:cs typeface="Arial" pitchFamily="34" charset="-120"/>
+              </a:rPr>
+              <a:t>Tout ce qu'il y a dans Bronze</a:t>
+            </a:r>
+            <a:endParaRPr lang="en-US" sz="1200" dirty="0"/>
+          </a:p>
+          <a:p>
+            <a:pPr marL="342900" indent="-342900">
+              <a:buSzPct val="100000"/>
+              <a:buChar char="•"/>
+            </a:pPr>
+            <a:r>
+              <a:rPr lang="en-US" sz="1200" dirty="0">
+                <a:solidFill>
+                  <a:srgbClr val="4A4A4A"/>
+                </a:solidFill>
+                <a:latin typeface="Arial" pitchFamily="34" charset="0"/>
+                <a:ea typeface="Arial" pitchFamily="34" charset="-122"/>
+                <a:cs typeface="Arial" pitchFamily="34" charset="-120"/>
+              </a:rPr>
+              <a:t>6 concepts de design personnalisés</a:t>
+            </a:r>
+            <a:endParaRPr lang="en-US" sz="1200" dirty="0"/>
+          </a:p>
+          <a:p>
+            <a:pPr marL="342900" indent="-342900">
+              <a:buSzPct val="100000"/>
+              <a:buChar char="•"/>
+            </a:pPr>
+            <a:r>
+              <a:rPr lang="en-US" sz="1200" dirty="0">
+                <a:solidFill>
+                  <a:srgbClr val="4A4A4A"/>
+                </a:solidFill>
+                <a:latin typeface="Arial" pitchFamily="34" charset="0"/>
+                <a:ea typeface="Arial" pitchFamily="34" charset="-122"/>
+                <a:cs typeface="Arial" pitchFamily="34" charset="-120"/>
+              </a:rPr>
+              <a:t>Design de carte de visite</a:t>
+            </a:r>
+            <a:endParaRPr lang="en-US" sz="1200" dirty="0"/>
+          </a:p>
+          <a:p>
+            <a:pPr marL="342900" indent="-342900">
+              <a:buSzPct val="100000"/>
+              <a:buChar char="•"/>
+            </a:pPr>
+            <a:r>
+              <a:rPr lang="en-US" sz="1200" dirty="0">
+                <a:solidFill>
+                  <a:srgbClr val="4A4A4A"/>
+                </a:solidFill>
+                <a:latin typeface="Arial" pitchFamily="34" charset="0"/>
+                <a:ea typeface="Arial" pitchFamily="34" charset="-122"/>
+                <a:cs typeface="Arial" pitchFamily="34" charset="-120"/>
+              </a:rPr>
+              <a:t>En-tête et enveloppe</a:t>
+            </a:r>
+            <a:endParaRPr lang="en-US" sz="1200" dirty="0"/>
+          </a:p>
+          <a:p>
+            <a:pPr marL="342900" indent="-342900">
+              <a:buSzPct val="100000"/>
+              <a:buChar char="•"/>
+            </a:pPr>
+            <a:r>
+              <a:rPr lang="en-US" sz="1200" dirty="0">
+                <a:solidFill>
+                  <a:srgbClr val="4A4A4A"/>
+                </a:solidFill>
+                <a:latin typeface="Arial" pitchFamily="34" charset="0"/>
+                <a:ea typeface="Arial" pitchFamily="34" charset="-122"/>
+                <a:cs typeface="Arial" pitchFamily="34" charset="-120"/>
+              </a:rPr>
+              <a:t>Droits sur la papeterie inclus</a:t>
+            </a:r>
+            <a:endParaRPr lang="en-US" sz="1200" dirty="0"/>
+          </a:p>
+        </p:txBody>
+      </p:sp>
     </p:spTree>
   </p:cSld>
   <p:clrMapOvr>
@@ -3551,6 +7011,129 @@
               <a:t>09 Discovery</a:t>
             </a:r>
             <a:endParaRPr lang="en-US" sz="1000" dirty="0"/>
+          </a:p>
+        </p:txBody>
+      </p:sp>
+      <p:sp>
+        <p:nvSpPr>
+          <p:cNvPr id="4" name="Text 2"/>
+          <p:cNvSpPr/>
+          <p:nvPr/>
+        </p:nvSpPr>
+        <p:spPr>
+          <a:xfrm>
+            <a:off x="457200" y="868680"/>
+            <a:ext cx="10972800" cy="502920"/>
+          </a:xfrm>
+          <a:prstGeom prst="rect">
+            <a:avLst/>
+          </a:prstGeom>
+          <a:noFill/>
+          <a:ln/>
+        </p:spPr>
+        <p:txBody>
+          <a:bodyPr wrap="square" rtlCol="0" anchor="t">
+            <a:normAutofit/>
+          </a:bodyPr>
+          <a:lstStyle/>
+          <a:p>
+            <a:pPr indent="0" marL="0">
+              <a:buNone/>
+            </a:pPr>
+            <a:r>
+              <a:rPr lang="en-US" sz="2200" b="1" dirty="0">
+                <a:solidFill>
+                  <a:srgbClr val="1A1A1A"/>
+                </a:solidFill>
+                <a:latin typeface="Arial" pitchFamily="34" charset="0"/>
+                <a:ea typeface="Arial" pitchFamily="34" charset="-122"/>
+                <a:cs typeface="Arial" pitchFamily="34" charset="-120"/>
+              </a:rPr>
+              <a:t>Découverte</a:t>
+            </a:r>
+            <a:endParaRPr lang="en-US" sz="2200" dirty="0"/>
+          </a:p>
+        </p:txBody>
+      </p:sp>
+      <p:sp>
+        <p:nvSpPr>
+          <p:cNvPr id="5" name="Text 3"/>
+          <p:cNvSpPr/>
+          <p:nvPr/>
+        </p:nvSpPr>
+        <p:spPr>
+          <a:xfrm>
+            <a:off x="457200" y="1481328"/>
+            <a:ext cx="10972800" cy="502920"/>
+          </a:xfrm>
+          <a:prstGeom prst="rect">
+            <a:avLst/>
+          </a:prstGeom>
+          <a:noFill/>
+          <a:ln/>
+        </p:spPr>
+        <p:txBody>
+          <a:bodyPr wrap="square" rtlCol="0" anchor="t">
+            <a:normAutofit/>
+          </a:bodyPr>
+          <a:lstStyle/>
+          <a:p>
+            <a:pPr indent="0" marL="0">
+              <a:buNone/>
+            </a:pPr>
+            <a:r>
+              <a:rPr lang="en-US" sz="2200" b="1" dirty="0">
+                <a:solidFill>
+                  <a:srgbClr val="1A1A1A"/>
+                </a:solidFill>
+                <a:latin typeface="Arial" pitchFamily="34" charset="0"/>
+                <a:ea typeface="Arial" pitchFamily="34" charset="-122"/>
+                <a:cs typeface="Arial" pitchFamily="34" charset="-120"/>
+              </a:rPr>
+              <a:t>Questions à poser pendant l'appel.</a:t>
+            </a:r>
+            <a:endParaRPr lang="en-US" sz="2200" dirty="0"/>
+          </a:p>
+        </p:txBody>
+      </p:sp>
+      <p:sp>
+        <p:nvSpPr>
+          <p:cNvPr id="6" name="Text 4"/>
+          <p:cNvSpPr/>
+          <p:nvPr/>
+        </p:nvSpPr>
+        <p:spPr>
+          <a:xfrm>
+            <a:off x="457200" y="2093976"/>
+            <a:ext cx="10972800" cy="502920"/>
+          </a:xfrm>
+          <a:prstGeom prst="rect">
+            <a:avLst/>
+          </a:prstGeom>
+          <a:noFill/>
+          <a:ln/>
+        </p:spPr>
+        <p:txBody>
+          <a:bodyPr wrap="square" rtlCol="0" anchor="t">
+            <a:normAutofit/>
+          </a:bodyPr>
+          <a:lstStyle/>
+          <a:p>
+            <a:pPr indent="0" marL="0">
+              <a:buNone/>
+            </a:pPr>
+            <a:r>
+              <a:rPr lang="en-US" sz="1300" dirty="0">
+                <a:solidFill>
+                  <a:srgbClr val="4A4A4A"/>
+                </a:solidFill>
+                <a:latin typeface="Arial" pitchFamily="34" charset="0"/>
+                <a:ea typeface="Arial" pitchFamily="34" charset="-122"/>
+                <a:cs typeface="Arial" pitchFamily="34" charset="-120"/>
+              </a:rPr>
+              <a:t>Sept questions, dans l'ordre. La première ouvre chaque conversation. La dernière clôt la plupart.</a:t>
+            </a:r>
+            <a:endParaRPr lang="en-US" sz="1300" dirty="0"/>
           </a:p>
         </p:txBody>
       </p:sp>
